--- a/content/W01/D3/C2_W01_D03_deck_STUDENT.pptx
+++ b/content/W01/D3/C2_W01_D03_deck_STUDENT.pptx
@@ -3214,7 +3214,7 @@
         <p:spPr>
           <a:xfrm>
             <a:off x="777240" y="1965960"/>
-            <a:ext cx="10607040" cy="4206240"/>
+            <a:ext cx="10607040" cy="1088136"/>
           </a:xfrm>
           <a:prstGeom prst="rect">
             <a:avLst/>
@@ -3233,7 +3233,7 @@
               </a:spcAft>
             </a:pPr>
             <a:r>
-              <a:rPr sz="2100">
+              <a:rPr sz="2100" b="0">
                 <a:solidFill>
                   <a:srgbClr val="1C1C1A"/>
                 </a:solidFill>
@@ -3249,7 +3249,7 @@
               </a:spcAft>
             </a:pPr>
             <a:r>
-              <a:rPr sz="2100">
+              <a:rPr sz="2100" b="0">
                 <a:solidFill>
                   <a:srgbClr val="1C1C1A"/>
                 </a:solidFill>
@@ -3268,7 +3268,7 @@
         </p:nvSpPr>
         <p:spPr>
           <a:xfrm>
-            <a:off x="777240" y="6263640"/>
+            <a:off x="777240" y="6309360"/>
             <a:ext cx="10607040" cy="365760"/>
           </a:xfrm>
           <a:prstGeom prst="rect">
@@ -3390,16 +3390,194 @@
           </a:p>
         </p:txBody>
       </p:sp>
-      <p:sp>
-        <p:nvSpPr>
-          <p:cNvPr id="4" name="TextBox 3"/>
-          <p:cNvSpPr txBox="1"/>
-          <p:nvPr/>
-        </p:nvSpPr>
-        <p:spPr>
-          <a:xfrm>
-            <a:off x="777240" y="1965960"/>
-            <a:ext cx="10607040" cy="4206240"/>
+      <p:graphicFrame>
+        <p:nvGraphicFramePr>
+          <p:cNvPr id="4" name="Table 3"/>
+          <p:cNvGraphicFramePr>
+            <a:graphicFrameLocks noGrp="1"/>
+          </p:cNvGraphicFramePr>
+          <p:nvPr/>
+        </p:nvGraphicFramePr>
+        <p:xfrm>
+          <a:off x="777240" y="1965960"/>
+          <a:ext cx="10607040" cy="1536192"/>
+        </p:xfrm>
+        <a:graphic>
+          <a:graphicData uri="http://schemas.openxmlformats.org/drawingml/2006/table">
+            <a:tbl>
+              <a:tblPr firstRow="1" bandRow="1">
+                <a:tableStyleId>{5C22544A-7EE6-4342-B048-85BDC9FD1C3A}</a:tableStyleId>
+              </a:tblPr>
+              <a:tblGrid>
+                <a:gridCol w="5303520"/>
+                <a:gridCol w="5303520"/>
+              </a:tblGrid>
+              <a:tr h="384048">
+                <a:tc>
+                  <a:txBody>
+                    <a:bodyPr/>
+                    <a:lstStyle/>
+                    <a:p>
+                      <a:r>
+                        <a:rPr sz="1300" b="1">
+                          <a:solidFill>
+                            <a:srgbClr val="2B4A7D"/>
+                          </a:solidFill>
+                          <a:latin typeface="Calibri"/>
+                        </a:rPr>
+                        <a:t>Count</a:t>
+                      </a:r>
+                    </a:p>
+                  </a:txBody>
+                  <a:tcPr marT="25400" marB="25400"/>
+                </a:tc>
+                <a:tc>
+                  <a:txBody>
+                    <a:bodyPr/>
+                    <a:lstStyle/>
+                    <a:p>
+                      <a:r>
+                        <a:rPr sz="1300" b="1">
+                          <a:solidFill>
+                            <a:srgbClr val="2B4A7D"/>
+                          </a:solidFill>
+                          <a:latin typeface="Calibri"/>
+                        </a:rPr>
+                        <a:t>The question it answers</a:t>
+                      </a:r>
+                    </a:p>
+                  </a:txBody>
+                  <a:tcPr marT="25400" marB="25400"/>
+                </a:tc>
+              </a:tr>
+              <a:tr h="384048">
+                <a:tc>
+                  <a:txBody>
+                    <a:bodyPr/>
+                    <a:lstStyle/>
+                    <a:p>
+                      <a:r>
+                        <a:rPr sz="1400" b="0">
+                          <a:solidFill>
+                            <a:srgbClr val="1C1C1A"/>
+                          </a:solidFill>
+                          <a:latin typeface="Calibri"/>
+                        </a:rPr>
+                        <a:t>present</a:t>
+                      </a:r>
+                    </a:p>
+                  </a:txBody>
+                  <a:tcPr marT="25400" marB="25400"/>
+                </a:tc>
+                <a:tc>
+                  <a:txBody>
+                    <a:bodyPr/>
+                    <a:lstStyle/>
+                    <a:p>
+                      <a:r>
+                        <a:rPr sz="1400" b="0">
+                          <a:solidFill>
+                            <a:srgbClr val="1C1C1A"/>
+                          </a:solidFill>
+                          <a:latin typeface="Calibri"/>
+                        </a:rPr>
+                        <a:t>Is this field being filled in?</a:t>
+                      </a:r>
+                    </a:p>
+                  </a:txBody>
+                  <a:tcPr marT="25400" marB="25400"/>
+                </a:tc>
+              </a:tr>
+              <a:tr h="384048">
+                <a:tc>
+                  <a:txBody>
+                    <a:bodyPr/>
+                    <a:lstStyle/>
+                    <a:p>
+                      <a:r>
+                        <a:rPr sz="1400" b="0">
+                          <a:solidFill>
+                            <a:srgbClr val="1C1C1A"/>
+                          </a:solidFill>
+                          <a:latin typeface="Calibri"/>
+                        </a:rPr>
+                        <a:t>converts</a:t>
+                      </a:r>
+                    </a:p>
+                  </a:txBody>
+                  <a:tcPr marT="25400" marB="25400"/>
+                </a:tc>
+                <a:tc>
+                  <a:txBody>
+                    <a:bodyPr/>
+                    <a:lstStyle/>
+                    <a:p>
+                      <a:r>
+                        <a:rPr sz="1400" b="0">
+                          <a:solidFill>
+                            <a:srgbClr val="1C1C1A"/>
+                          </a:solidFill>
+                          <a:latin typeface="Calibri"/>
+                        </a:rPr>
+                        <a:t>Is what is filled in usable?</a:t>
+                      </a:r>
+                    </a:p>
+                  </a:txBody>
+                  <a:tcPr marT="25400" marB="25400"/>
+                </a:tc>
+              </a:tr>
+              <a:tr h="384048">
+                <a:tc>
+                  <a:txBody>
+                    <a:bodyPr/>
+                    <a:lstStyle/>
+                    <a:p>
+                      <a:r>
+                        <a:rPr sz="1400" b="0">
+                          <a:solidFill>
+                            <a:srgbClr val="1C1C1A"/>
+                          </a:solidFill>
+                          <a:latin typeface="Calibri"/>
+                        </a:rPr>
+                        <a:t>distinct</a:t>
+                      </a:r>
+                    </a:p>
+                  </a:txBody>
+                  <a:tcPr marT="25400" marB="25400"/>
+                </a:tc>
+                <a:tc>
+                  <a:txBody>
+                    <a:bodyPr/>
+                    <a:lstStyle/>
+                    <a:p>
+                      <a:r>
+                        <a:rPr sz="1400" b="0">
+                          <a:solidFill>
+                            <a:srgbClr val="1C1C1A"/>
+                          </a:solidFill>
+                          <a:latin typeface="Calibri"/>
+                        </a:rPr>
+                        <a:t>Is this a category, a free text box, or an id?</a:t>
+                      </a:r>
+                    </a:p>
+                  </a:txBody>
+                  <a:tcPr marT="25400" marB="25400"/>
+                </a:tc>
+              </a:tr>
+            </a:tbl>
+          </a:graphicData>
+        </a:graphic>
+      </p:graphicFrame>
+      <p:sp>
+        <p:nvSpPr>
+          <p:cNvPr id="5" name="TextBox 4"/>
+          <p:cNvSpPr txBox="1"/>
+          <p:nvPr/>
+        </p:nvSpPr>
+        <p:spPr>
+          <a:xfrm>
+            <a:off x="777240" y="3685032"/>
+            <a:ext cx="10607040" cy="704088"/>
           </a:xfrm>
           <a:prstGeom prst="rect">
             <a:avLst/>
@@ -3418,92 +3596,12 @@
               </a:spcAft>
             </a:pPr>
             <a:r>
-              <a:rPr sz="2100">
+              <a:rPr sz="2100" b="0">
                 <a:solidFill>
                   <a:srgbClr val="1C1C1A"/>
                 </a:solidFill>
                 <a:latin typeface="Calibri"/>
               </a:rPr>
-              <a:t>| Count | The question it answers |</a:t>
-            </a:r>
-          </a:p>
-          <a:p>
-            <a:pPr>
-              <a:spcAft>
-                <a:spcPts val="1000"/>
-              </a:spcAft>
-            </a:pPr>
-            <a:r>
-              <a:rPr sz="2100">
-                <a:solidFill>
-                  <a:srgbClr val="1C1C1A"/>
-                </a:solidFill>
-                <a:latin typeface="Calibri"/>
-              </a:rPr>
-              <a:t>|---|---|</a:t>
-            </a:r>
-          </a:p>
-          <a:p>
-            <a:pPr>
-              <a:spcAft>
-                <a:spcPts val="1000"/>
-              </a:spcAft>
-            </a:pPr>
-            <a:r>
-              <a:rPr sz="2100">
-                <a:solidFill>
-                  <a:srgbClr val="1C1C1A"/>
-                </a:solidFill>
-                <a:latin typeface="Calibri"/>
-              </a:rPr>
-              <a:t>| present | Is this field being filled in? |</a:t>
-            </a:r>
-          </a:p>
-          <a:p>
-            <a:pPr>
-              <a:spcAft>
-                <a:spcPts val="1000"/>
-              </a:spcAft>
-            </a:pPr>
-            <a:r>
-              <a:rPr sz="2100">
-                <a:solidFill>
-                  <a:srgbClr val="1C1C1A"/>
-                </a:solidFill>
-                <a:latin typeface="Calibri"/>
-              </a:rPr>
-              <a:t>| converts | Is what is filled in usable? |</a:t>
-            </a:r>
-          </a:p>
-          <a:p>
-            <a:pPr>
-              <a:spcAft>
-                <a:spcPts val="1000"/>
-              </a:spcAft>
-            </a:pPr>
-            <a:r>
-              <a:rPr sz="2100">
-                <a:solidFill>
-                  <a:srgbClr val="1C1C1A"/>
-                </a:solidFill>
-                <a:latin typeface="Calibri"/>
-              </a:rPr>
-              <a:t>| distinct | Is this a category, a free text box, or an id? |</a:t>
-            </a:r>
-          </a:p>
-          <a:p>
-            <a:pPr>
-              <a:spcAft>
-                <a:spcPts val="1000"/>
-              </a:spcAft>
-            </a:pPr>
-            <a:r>
-              <a:rPr sz="2100">
-                <a:solidFill>
-                  <a:srgbClr val="1C1C1A"/>
-                </a:solidFill>
-                <a:latin typeface="Calibri"/>
-              </a:rPr>
               <a:t>present minus converts is the number of values that look fine and are not.</a:t>
             </a:r>
           </a:p>
@@ -3511,13 +3609,13 @@
       </p:sp>
       <p:sp>
         <p:nvSpPr>
-          <p:cNvPr id="5" name="TextBox 4"/>
-          <p:cNvSpPr txBox="1"/>
-          <p:nvPr/>
-        </p:nvSpPr>
-        <p:spPr>
-          <a:xfrm>
-            <a:off x="777240" y="6263640"/>
+          <p:cNvPr id="6" name="TextBox 5"/>
+          <p:cNvSpPr txBox="1"/>
+          <p:nvPr/>
+        </p:nvSpPr>
+        <p:spPr>
+          <a:xfrm>
+            <a:off x="777240" y="6309360"/>
             <a:ext cx="10607040" cy="365760"/>
           </a:xfrm>
           <a:prstGeom prst="rect">
@@ -3648,7 +3746,7 @@
         <p:spPr>
           <a:xfrm>
             <a:off x="777240" y="1965960"/>
-            <a:ext cx="10607040" cy="4206240"/>
+            <a:ext cx="10607040" cy="704088"/>
           </a:xfrm>
           <a:prstGeom prst="rect">
             <a:avLst/>
@@ -3667,7 +3765,7 @@
               </a:spcAft>
             </a:pPr>
             <a:r>
-              <a:rPr sz="1700">
+              <a:rPr sz="1700" b="0">
                 <a:solidFill>
                   <a:srgbClr val="2B4A7D"/>
                 </a:solidFill>
@@ -3676,6 +3774,29 @@
               <a:t>amount    present 48/50   converts 44/50   distinct 46</a:t>
             </a:r>
           </a:p>
+        </p:txBody>
+      </p:sp>
+      <p:sp>
+        <p:nvSpPr>
+          <p:cNvPr id="5" name="TextBox 4"/>
+          <p:cNvSpPr txBox="1"/>
+          <p:nvPr/>
+        </p:nvSpPr>
+        <p:spPr>
+          <a:xfrm>
+            <a:off x="777240" y="2807208"/>
+            <a:ext cx="10607040" cy="1088136"/>
+          </a:xfrm>
+          <a:prstGeom prst="rect">
+            <a:avLst/>
+          </a:prstGeom>
+          <a:noFill/>
+        </p:spPr>
+        <p:txBody>
+          <a:bodyPr wrap="square">
+            <a:spAutoFit/>
+          </a:bodyPr>
+          <a:lstStyle/>
           <a:p>
             <a:pPr>
               <a:spcAft>
@@ -3683,7 +3804,7 @@
               </a:spcAft>
             </a:pPr>
             <a:r>
-              <a:rPr sz="2100">
+              <a:rPr sz="2100" b="0">
                 <a:solidFill>
                   <a:srgbClr val="1C1C1A"/>
                 </a:solidFill>
@@ -3699,7 +3820,7 @@
               </a:spcAft>
             </a:pPr>
             <a:r>
-              <a:rPr sz="2100">
+              <a:rPr sz="2100" b="0">
                 <a:solidFill>
                   <a:srgbClr val="1C1C1A"/>
                 </a:solidFill>
@@ -3712,13 +3833,13 @@
       </p:sp>
       <p:sp>
         <p:nvSpPr>
-          <p:cNvPr id="5" name="TextBox 4"/>
-          <p:cNvSpPr txBox="1"/>
-          <p:nvPr/>
-        </p:nvSpPr>
-        <p:spPr>
-          <a:xfrm>
-            <a:off x="777240" y="6263640"/>
+          <p:cNvPr id="6" name="TextBox 5"/>
+          <p:cNvSpPr txBox="1"/>
+          <p:nvPr/>
+        </p:nvSpPr>
+        <p:spPr>
+          <a:xfrm>
+            <a:off x="777240" y="6309360"/>
             <a:ext cx="10607040" cy="365760"/>
           </a:xfrm>
           <a:prstGeom prst="rect">
@@ -3849,7 +3970,7 @@
         <p:spPr>
           <a:xfrm>
             <a:off x="777240" y="1965960"/>
-            <a:ext cx="10607040" cy="4206240"/>
+            <a:ext cx="10607040" cy="1856231"/>
           </a:xfrm>
           <a:prstGeom prst="rect">
             <a:avLst/>
@@ -3868,7 +3989,7 @@
               </a:spcAft>
             </a:pPr>
             <a:r>
-              <a:rPr sz="2100">
+              <a:rPr sz="2100" b="0">
                 <a:solidFill>
                   <a:srgbClr val="1C1C1A"/>
                 </a:solidFill>
@@ -3884,7 +4005,7 @@
               </a:spcAft>
             </a:pPr>
             <a:r>
-              <a:rPr sz="2100">
+              <a:rPr sz="2100" b="0">
                 <a:solidFill>
                   <a:srgbClr val="1C1C1A"/>
                 </a:solidFill>
@@ -3900,7 +4021,7 @@
               </a:spcAft>
             </a:pPr>
             <a:r>
-              <a:rPr sz="2100">
+              <a:rPr sz="2100" b="0">
                 <a:solidFill>
                   <a:srgbClr val="1C1C1A"/>
                 </a:solidFill>
@@ -3916,7 +4037,7 @@
               </a:spcAft>
             </a:pPr>
             <a:r>
-              <a:rPr sz="2100">
+              <a:rPr sz="2100" b="0">
                 <a:solidFill>
                   <a:srgbClr val="1C1C1A"/>
                 </a:solidFill>
@@ -3935,7 +4056,7 @@
         </p:nvSpPr>
         <p:spPr>
           <a:xfrm>
-            <a:off x="777240" y="6263640"/>
+            <a:off x="777240" y="6309360"/>
             <a:ext cx="10607040" cy="365760"/>
           </a:xfrm>
           <a:prstGeom prst="rect">
@@ -4067,7 +4188,7 @@
         <p:spPr>
           <a:xfrm>
             <a:off x="777240" y="1965960"/>
-            <a:ext cx="10607040" cy="4206240"/>
+            <a:ext cx="10607040" cy="704088"/>
           </a:xfrm>
           <a:prstGeom prst="rect">
             <a:avLst/>
@@ -4086,13 +4207,31 @@
               </a:spcAft>
             </a:pPr>
             <a:r>
-              <a:rPr sz="2100">
+              <a:rPr sz="2100" b="0">
                 <a:solidFill>
                   <a:srgbClr val="FFFFFF"/>
                 </a:solidFill>
                 <a:latin typeface="Calibri"/>
               </a:rPr>
-              <a:t>[profile the columns] &gt; **[decide per field]** &gt; [find the hidden rows] &gt; [investigate the extremes] &gt; [ship with the log]</a:t>
+              <a:t>[profile the columns] &gt; </a:t>
+            </a:r>
+            <a:r>
+              <a:rPr sz="2100" b="1">
+                <a:solidFill>
+                  <a:srgbClr val="FFFFFF"/>
+                </a:solidFill>
+                <a:latin typeface="Calibri"/>
+              </a:rPr>
+              <a:t>[decide per field]</a:t>
+            </a:r>
+            <a:r>
+              <a:rPr sz="2100" b="0">
+                <a:solidFill>
+                  <a:srgbClr val="FFFFFF"/>
+                </a:solidFill>
+                <a:latin typeface="Calibri"/>
+              </a:rPr>
+              <a:t> &gt; [find the hidden rows] &gt; [investigate the extremes] &gt; [ship with the log]</a:t>
             </a:r>
           </a:p>
         </p:txBody>
@@ -4105,7 +4244,7 @@
         </p:nvSpPr>
         <p:spPr>
           <a:xfrm>
-            <a:off x="777240" y="6263640"/>
+            <a:off x="777240" y="6309360"/>
             <a:ext cx="10607040" cy="365760"/>
           </a:xfrm>
           <a:prstGeom prst="rect">
@@ -4236,7 +4375,7 @@
         <p:spPr>
           <a:xfrm>
             <a:off x="777240" y="1965960"/>
-            <a:ext cx="10607040" cy="4206240"/>
+            <a:ext cx="10607040" cy="704088"/>
           </a:xfrm>
           <a:prstGeom prst="rect">
             <a:avLst/>
@@ -4255,7 +4394,7 @@
               </a:spcAft>
             </a:pPr>
             <a:r>
-              <a:rPr sz="2100">
+              <a:rPr sz="2100" b="0">
                 <a:solidFill>
                   <a:srgbClr val="1C1C1A"/>
                 </a:solidFill>
@@ -4274,7 +4413,7 @@
         </p:nvSpPr>
         <p:spPr>
           <a:xfrm>
-            <a:off x="777240" y="6263640"/>
+            <a:off x="777240" y="6309360"/>
             <a:ext cx="10607040" cy="365760"/>
           </a:xfrm>
           <a:prstGeom prst="rect">
@@ -4396,109 +4535,257 @@
           </a:p>
         </p:txBody>
       </p:sp>
-      <p:sp>
-        <p:nvSpPr>
-          <p:cNvPr id="4" name="TextBox 3"/>
-          <p:cNvSpPr txBox="1"/>
-          <p:nvPr/>
-        </p:nvSpPr>
-        <p:spPr>
-          <a:xfrm>
-            <a:off x="777240" y="1965960"/>
-            <a:ext cx="10607040" cy="4206240"/>
-          </a:xfrm>
-          <a:prstGeom prst="rect">
-            <a:avLst/>
-          </a:prstGeom>
-          <a:noFill/>
-        </p:spPr>
-        <p:txBody>
-          <a:bodyPr wrap="square">
-            <a:spAutoFit/>
-          </a:bodyPr>
-          <a:lstStyle/>
-          <a:p>
-            <a:pPr>
-              <a:spcAft>
-                <a:spcPts val="1000"/>
-              </a:spcAft>
-            </a:pPr>
-            <a:r>
-              <a:rPr sz="2100">
-                <a:solidFill>
-                  <a:srgbClr val="1C1C1A"/>
-                </a:solidFill>
-                <a:latin typeface="Calibri"/>
-              </a:rPr>
-              <a:t>| Choice | Use it when | It costs you |</a:t>
-            </a:r>
-          </a:p>
-          <a:p>
-            <a:pPr>
-              <a:spcAft>
-                <a:spcPts val="1000"/>
-              </a:spcAft>
-            </a:pPr>
-            <a:r>
-              <a:rPr sz="2100">
-                <a:solidFill>
-                  <a:srgbClr val="1C1C1A"/>
-                </a:solidFill>
-                <a:latin typeface="Calibri"/>
-              </a:rPr>
-              <a:t>|---|---|---|</a:t>
-            </a:r>
-          </a:p>
-          <a:p>
-            <a:pPr>
-              <a:spcAft>
-                <a:spcPts val="1000"/>
-              </a:spcAft>
-            </a:pPr>
-            <a:r>
-              <a:rPr sz="2100">
-                <a:solidFill>
-                  <a:srgbClr val="1C1C1A"/>
-                </a:solidFill>
-                <a:latin typeface="Calibri"/>
-              </a:rPr>
-              <a:t>| Drop the record | The field is required and the record is unusable without it | Every other field on that record |</a:t>
-            </a:r>
-          </a:p>
-          <a:p>
-            <a:pPr>
-              <a:spcAft>
-                <a:spcPts val="1000"/>
-              </a:spcAft>
-            </a:pPr>
-            <a:r>
-              <a:rPr sz="2100">
-                <a:solidFill>
-                  <a:srgbClr val="1C1C1A"/>
-                </a:solidFill>
-                <a:latin typeface="Calibri"/>
-              </a:rPr>
-              <a:t>| Use a stated default | Absence genuinely means something, and you can say what | The ability to tell absent from present-and-equal-to-the-default |</a:t>
-            </a:r>
-          </a:p>
-          <a:p>
-            <a:pPr>
-              <a:spcAft>
-                <a:spcPts val="1000"/>
-              </a:spcAft>
-            </a:pPr>
-            <a:r>
-              <a:rPr sz="2100">
-                <a:solidFill>
-                  <a:srgbClr val="1C1C1A"/>
-                </a:solidFill>
-                <a:latin typeface="Calibri"/>
-              </a:rPr>
-              <a:t>| Keep and flag | You need the record and the gap must travel with it | Every downstream reader has to handle the flag |</a:t>
-            </a:r>
-          </a:p>
-        </p:txBody>
-      </p:sp>
+      <p:graphicFrame>
+        <p:nvGraphicFramePr>
+          <p:cNvPr id="4" name="Table 3"/>
+          <p:cNvGraphicFramePr>
+            <a:graphicFrameLocks noGrp="1"/>
+          </p:cNvGraphicFramePr>
+          <p:nvPr/>
+        </p:nvGraphicFramePr>
+        <p:xfrm>
+          <a:off x="777240" y="1965960"/>
+          <a:ext cx="10607040" cy="1536192"/>
+        </p:xfrm>
+        <a:graphic>
+          <a:graphicData uri="http://schemas.openxmlformats.org/drawingml/2006/table">
+            <a:tbl>
+              <a:tblPr firstRow="1" bandRow="1">
+                <a:tableStyleId>{5C22544A-7EE6-4342-B048-85BDC9FD1C3A}</a:tableStyleId>
+              </a:tblPr>
+              <a:tblGrid>
+                <a:gridCol w="3535680"/>
+                <a:gridCol w="3535680"/>
+                <a:gridCol w="3535680"/>
+              </a:tblGrid>
+              <a:tr h="384048">
+                <a:tc>
+                  <a:txBody>
+                    <a:bodyPr/>
+                    <a:lstStyle/>
+                    <a:p>
+                      <a:r>
+                        <a:rPr sz="1300" b="1">
+                          <a:solidFill>
+                            <a:srgbClr val="2B4A7D"/>
+                          </a:solidFill>
+                          <a:latin typeface="Calibri"/>
+                        </a:rPr>
+                        <a:t>Choice</a:t>
+                      </a:r>
+                    </a:p>
+                  </a:txBody>
+                  <a:tcPr marT="25400" marB="25400"/>
+                </a:tc>
+                <a:tc>
+                  <a:txBody>
+                    <a:bodyPr/>
+                    <a:lstStyle/>
+                    <a:p>
+                      <a:r>
+                        <a:rPr sz="1300" b="1">
+                          <a:solidFill>
+                            <a:srgbClr val="2B4A7D"/>
+                          </a:solidFill>
+                          <a:latin typeface="Calibri"/>
+                        </a:rPr>
+                        <a:t>Use it when</a:t>
+                      </a:r>
+                    </a:p>
+                  </a:txBody>
+                  <a:tcPr marT="25400" marB="25400"/>
+                </a:tc>
+                <a:tc>
+                  <a:txBody>
+                    <a:bodyPr/>
+                    <a:lstStyle/>
+                    <a:p>
+                      <a:r>
+                        <a:rPr sz="1300" b="1">
+                          <a:solidFill>
+                            <a:srgbClr val="2B4A7D"/>
+                          </a:solidFill>
+                          <a:latin typeface="Calibri"/>
+                        </a:rPr>
+                        <a:t>It costs you</a:t>
+                      </a:r>
+                    </a:p>
+                  </a:txBody>
+                  <a:tcPr marT="25400" marB="25400"/>
+                </a:tc>
+              </a:tr>
+              <a:tr h="384048">
+                <a:tc>
+                  <a:txBody>
+                    <a:bodyPr/>
+                    <a:lstStyle/>
+                    <a:p>
+                      <a:r>
+                        <a:rPr sz="1400" b="0">
+                          <a:solidFill>
+                            <a:srgbClr val="1C1C1A"/>
+                          </a:solidFill>
+                          <a:latin typeface="Calibri"/>
+                        </a:rPr>
+                        <a:t>Drop the record</a:t>
+                      </a:r>
+                    </a:p>
+                  </a:txBody>
+                  <a:tcPr marT="25400" marB="25400"/>
+                </a:tc>
+                <a:tc>
+                  <a:txBody>
+                    <a:bodyPr/>
+                    <a:lstStyle/>
+                    <a:p>
+                      <a:r>
+                        <a:rPr sz="1400" b="0">
+                          <a:solidFill>
+                            <a:srgbClr val="1C1C1A"/>
+                          </a:solidFill>
+                          <a:latin typeface="Calibri"/>
+                        </a:rPr>
+                        <a:t>The field is required and the record is unusable without it</a:t>
+                      </a:r>
+                    </a:p>
+                  </a:txBody>
+                  <a:tcPr marT="25400" marB="25400"/>
+                </a:tc>
+                <a:tc>
+                  <a:txBody>
+                    <a:bodyPr/>
+                    <a:lstStyle/>
+                    <a:p>
+                      <a:r>
+                        <a:rPr sz="1400" b="0">
+                          <a:solidFill>
+                            <a:srgbClr val="1C1C1A"/>
+                          </a:solidFill>
+                          <a:latin typeface="Calibri"/>
+                        </a:rPr>
+                        <a:t>Every other field on that record</a:t>
+                      </a:r>
+                    </a:p>
+                  </a:txBody>
+                  <a:tcPr marT="25400" marB="25400"/>
+                </a:tc>
+              </a:tr>
+              <a:tr h="384048">
+                <a:tc>
+                  <a:txBody>
+                    <a:bodyPr/>
+                    <a:lstStyle/>
+                    <a:p>
+                      <a:r>
+                        <a:rPr sz="1400" b="0">
+                          <a:solidFill>
+                            <a:srgbClr val="1C1C1A"/>
+                          </a:solidFill>
+                          <a:latin typeface="Calibri"/>
+                        </a:rPr>
+                        <a:t>Use a stated default</a:t>
+                      </a:r>
+                    </a:p>
+                  </a:txBody>
+                  <a:tcPr marT="25400" marB="25400"/>
+                </a:tc>
+                <a:tc>
+                  <a:txBody>
+                    <a:bodyPr/>
+                    <a:lstStyle/>
+                    <a:p>
+                      <a:r>
+                        <a:rPr sz="1400" b="0">
+                          <a:solidFill>
+                            <a:srgbClr val="1C1C1A"/>
+                          </a:solidFill>
+                          <a:latin typeface="Calibri"/>
+                        </a:rPr>
+                        <a:t>Absence genuinely means something, and you can say what</a:t>
+                      </a:r>
+                    </a:p>
+                  </a:txBody>
+                  <a:tcPr marT="25400" marB="25400"/>
+                </a:tc>
+                <a:tc>
+                  <a:txBody>
+                    <a:bodyPr/>
+                    <a:lstStyle/>
+                    <a:p>
+                      <a:r>
+                        <a:rPr sz="1400" b="0">
+                          <a:solidFill>
+                            <a:srgbClr val="1C1C1A"/>
+                          </a:solidFill>
+                          <a:latin typeface="Calibri"/>
+                        </a:rPr>
+                        <a:t>The ability to tell absent from present-and-equal-to-the-default</a:t>
+                      </a:r>
+                    </a:p>
+                  </a:txBody>
+                  <a:tcPr marT="25400" marB="25400"/>
+                </a:tc>
+              </a:tr>
+              <a:tr h="384048">
+                <a:tc>
+                  <a:txBody>
+                    <a:bodyPr/>
+                    <a:lstStyle/>
+                    <a:p>
+                      <a:r>
+                        <a:rPr sz="1400" b="0">
+                          <a:solidFill>
+                            <a:srgbClr val="1C1C1A"/>
+                          </a:solidFill>
+                          <a:latin typeface="Calibri"/>
+                        </a:rPr>
+                        <a:t>Keep and flag</a:t>
+                      </a:r>
+                    </a:p>
+                  </a:txBody>
+                  <a:tcPr marT="25400" marB="25400"/>
+                </a:tc>
+                <a:tc>
+                  <a:txBody>
+                    <a:bodyPr/>
+                    <a:lstStyle/>
+                    <a:p>
+                      <a:r>
+                        <a:rPr sz="1400" b="0">
+                          <a:solidFill>
+                            <a:srgbClr val="1C1C1A"/>
+                          </a:solidFill>
+                          <a:latin typeface="Calibri"/>
+                        </a:rPr>
+                        <a:t>You need the record and the gap must travel with it</a:t>
+                      </a:r>
+                    </a:p>
+                  </a:txBody>
+                  <a:tcPr marT="25400" marB="25400"/>
+                </a:tc>
+                <a:tc>
+                  <a:txBody>
+                    <a:bodyPr/>
+                    <a:lstStyle/>
+                    <a:p>
+                      <a:r>
+                        <a:rPr sz="1400" b="0">
+                          <a:solidFill>
+                            <a:srgbClr val="1C1C1A"/>
+                          </a:solidFill>
+                          <a:latin typeface="Calibri"/>
+                        </a:rPr>
+                        <a:t>Every downstream reader has to handle the flag</a:t>
+                      </a:r>
+                    </a:p>
+                  </a:txBody>
+                  <a:tcPr marT="25400" marB="25400"/>
+                </a:tc>
+              </a:tr>
+            </a:tbl>
+          </a:graphicData>
+        </a:graphic>
+      </p:graphicFrame>
       <p:sp>
         <p:nvSpPr>
           <p:cNvPr id="5" name="TextBox 4"/>
@@ -4507,7 +4794,7 @@
         </p:nvSpPr>
         <p:spPr>
           <a:xfrm>
-            <a:off x="777240" y="6263640"/>
+            <a:off x="777240" y="6309360"/>
             <a:ext cx="10607040" cy="365760"/>
           </a:xfrm>
           <a:prstGeom prst="rect">
@@ -4638,7 +4925,7 @@
         <p:spPr>
           <a:xfrm>
             <a:off x="777240" y="1965960"/>
-            <a:ext cx="10607040" cy="4206240"/>
+            <a:ext cx="10607040" cy="1472184"/>
           </a:xfrm>
           <a:prstGeom prst="rect">
             <a:avLst/>
@@ -4657,7 +4944,7 @@
               </a:spcAft>
             </a:pPr>
             <a:r>
-              <a:rPr sz="2100">
+              <a:rPr sz="2100" b="0">
                 <a:solidFill>
                   <a:srgbClr val="1C1C1A"/>
                 </a:solidFill>
@@ -4673,7 +4960,7 @@
               </a:spcAft>
             </a:pPr>
             <a:r>
-              <a:rPr sz="2100">
+              <a:rPr sz="2100" b="0">
                 <a:solidFill>
                   <a:srgbClr val="1C1C1A"/>
                 </a:solidFill>
@@ -4689,7 +4976,7 @@
               </a:spcAft>
             </a:pPr>
             <a:r>
-              <a:rPr sz="2100">
+              <a:rPr sz="2100" b="0">
                 <a:solidFill>
                   <a:srgbClr val="1C1C1A"/>
                 </a:solidFill>
@@ -4708,7 +4995,7 @@
         </p:nvSpPr>
         <p:spPr>
           <a:xfrm>
-            <a:off x="777240" y="6263640"/>
+            <a:off x="777240" y="6309360"/>
             <a:ext cx="10607040" cy="365760"/>
           </a:xfrm>
           <a:prstGeom prst="rect">
@@ -4839,7 +5126,7 @@
         <p:spPr>
           <a:xfrm>
             <a:off x="777240" y="1965960"/>
-            <a:ext cx="10607040" cy="4206240"/>
+            <a:ext cx="10607040" cy="1088136"/>
           </a:xfrm>
           <a:prstGeom prst="rect">
             <a:avLst/>
@@ -4858,7 +5145,7 @@
               </a:spcAft>
             </a:pPr>
             <a:r>
-              <a:rPr sz="2100">
+              <a:rPr sz="2100" b="0">
                 <a:solidFill>
                   <a:srgbClr val="1C1C1A"/>
                 </a:solidFill>
@@ -4874,7 +5161,7 @@
               </a:spcAft>
             </a:pPr>
             <a:r>
-              <a:rPr sz="2100">
+              <a:rPr sz="2100" b="0">
                 <a:solidFill>
                   <a:srgbClr val="1C1C1A"/>
                 </a:solidFill>
@@ -4893,7 +5180,7 @@
         </p:nvSpPr>
         <p:spPr>
           <a:xfrm>
-            <a:off x="777240" y="6263640"/>
+            <a:off x="777240" y="6309360"/>
             <a:ext cx="10607040" cy="365760"/>
           </a:xfrm>
           <a:prstGeom prst="rect">
@@ -5024,7 +5311,7 @@
         <p:spPr>
           <a:xfrm>
             <a:off x="777240" y="1965960"/>
-            <a:ext cx="10607040" cy="4206240"/>
+            <a:ext cx="10607040" cy="1088136"/>
           </a:xfrm>
           <a:prstGeom prst="rect">
             <a:avLst/>
@@ -5043,7 +5330,7 @@
               </a:spcAft>
             </a:pPr>
             <a:r>
-              <a:rPr sz="2100">
+              <a:rPr sz="2100" b="0">
                 <a:solidFill>
                   <a:srgbClr val="1C1C1A"/>
                 </a:solidFill>
@@ -5059,7 +5346,7 @@
               </a:spcAft>
             </a:pPr>
             <a:r>
-              <a:rPr sz="2100">
+              <a:rPr sz="2100" b="0">
                 <a:solidFill>
                   <a:srgbClr val="1C1C1A"/>
                 </a:solidFill>
@@ -5078,7 +5365,7 @@
         </p:nvSpPr>
         <p:spPr>
           <a:xfrm>
-            <a:off x="777240" y="6263640"/>
+            <a:off x="777240" y="6309360"/>
             <a:ext cx="10607040" cy="365760"/>
           </a:xfrm>
           <a:prstGeom prst="rect">
@@ -5209,7 +5496,7 @@
         <p:spPr>
           <a:xfrm>
             <a:off x="777240" y="1965960"/>
-            <a:ext cx="10607040" cy="4206240"/>
+            <a:ext cx="10607040" cy="1472184"/>
           </a:xfrm>
           <a:prstGeom prst="rect">
             <a:avLst/>
@@ -5228,7 +5515,7 @@
               </a:spcAft>
             </a:pPr>
             <a:r>
-              <a:rPr sz="2100">
+              <a:rPr sz="2100" b="0">
                 <a:solidFill>
                   <a:srgbClr val="1C1C1A"/>
                 </a:solidFill>
@@ -5244,7 +5531,7 @@
               </a:spcAft>
             </a:pPr>
             <a:r>
-              <a:rPr sz="2100">
+              <a:rPr sz="2100" b="0">
                 <a:solidFill>
                   <a:srgbClr val="1C1C1A"/>
                 </a:solidFill>
@@ -5260,7 +5547,7 @@
               </a:spcAft>
             </a:pPr>
             <a:r>
-              <a:rPr sz="2100">
+              <a:rPr sz="2100" b="0">
                 <a:solidFill>
                   <a:srgbClr val="1C1C1A"/>
                 </a:solidFill>
@@ -5279,7 +5566,7 @@
         </p:nvSpPr>
         <p:spPr>
           <a:xfrm>
-            <a:off x="777240" y="6263640"/>
+            <a:off x="777240" y="6309360"/>
             <a:ext cx="10607040" cy="365760"/>
           </a:xfrm>
           <a:prstGeom prst="rect">
@@ -5410,7 +5697,7 @@
         <p:spPr>
           <a:xfrm>
             <a:off x="777240" y="1965960"/>
-            <a:ext cx="10607040" cy="4206240"/>
+            <a:ext cx="10607040" cy="704088"/>
           </a:xfrm>
           <a:prstGeom prst="rect">
             <a:avLst/>
@@ -5429,7 +5716,7 @@
               </a:spcAft>
             </a:pPr>
             <a:r>
-              <a:rPr sz="2100">
+              <a:rPr sz="2100" b="0">
                 <a:solidFill>
                   <a:srgbClr val="1C1C1A"/>
                 </a:solidFill>
@@ -5438,6 +5725,29 @@
               <a:t>Two printouts of the same Kalpa Retail order book. Which of these would you trust?</a:t>
             </a:r>
           </a:p>
+        </p:txBody>
+      </p:sp>
+      <p:sp>
+        <p:nvSpPr>
+          <p:cNvPr id="5" name="TextBox 4"/>
+          <p:cNvSpPr txBox="1"/>
+          <p:nvPr/>
+        </p:nvSpPr>
+        <p:spPr>
+          <a:xfrm>
+            <a:off x="777240" y="2807208"/>
+            <a:ext cx="10607040" cy="1856231"/>
+          </a:xfrm>
+          <a:prstGeom prst="rect">
+            <a:avLst/>
+          </a:prstGeom>
+          <a:noFill/>
+        </p:spPr>
+        <p:txBody>
+          <a:bodyPr wrap="square">
+            <a:spAutoFit/>
+          </a:bodyPr>
+          <a:lstStyle/>
           <a:p>
             <a:pPr>
               <a:spcAft>
@@ -5445,7 +5755,7 @@
               </a:spcAft>
             </a:pPr>
             <a:r>
-              <a:rPr sz="1700">
+              <a:rPr sz="1700" b="0">
                 <a:solidFill>
                   <a:srgbClr val="2B4A7D"/>
                 </a:solidFill>
@@ -5461,7 +5771,7 @@
               </a:spcAft>
             </a:pPr>
             <a:r>
-              <a:rPr sz="1700">
+              <a:rPr sz="1700" b="0">
                 <a:solidFill>
                   <a:srgbClr val="2B4A7D"/>
                 </a:solidFill>
@@ -5477,7 +5787,7 @@
               </a:spcAft>
             </a:pPr>
             <a:r>
-              <a:rPr sz="1700">
+              <a:rPr sz="1700" b="0">
                 <a:solidFill>
                   <a:srgbClr val="2B4A7D"/>
                 </a:solidFill>
@@ -5493,7 +5803,7 @@
               </a:spcAft>
             </a:pPr>
             <a:r>
-              <a:rPr sz="1700">
+              <a:rPr sz="1700" b="0">
                 <a:solidFill>
                   <a:srgbClr val="2B4A7D"/>
                 </a:solidFill>
@@ -5502,6 +5812,29 @@
               <a:t>discount  present 11/50                   present 50/50</a:t>
             </a:r>
           </a:p>
+        </p:txBody>
+      </p:sp>
+      <p:sp>
+        <p:nvSpPr>
+          <p:cNvPr id="6" name="TextBox 5"/>
+          <p:cNvSpPr txBox="1"/>
+          <p:nvPr/>
+        </p:nvSpPr>
+        <p:spPr>
+          <a:xfrm>
+            <a:off x="777240" y="4800600"/>
+            <a:ext cx="10607040" cy="704088"/>
+          </a:xfrm>
+          <a:prstGeom prst="rect">
+            <a:avLst/>
+          </a:prstGeom>
+          <a:noFill/>
+        </p:spPr>
+        <p:txBody>
+          <a:bodyPr wrap="square">
+            <a:spAutoFit/>
+          </a:bodyPr>
+          <a:lstStyle/>
           <a:p>
             <a:pPr>
               <a:spcAft>
@@ -5509,7 +5842,7 @@
               </a:spcAft>
             </a:pPr>
             <a:r>
-              <a:rPr sz="2100">
+              <a:rPr sz="2100" b="0">
                 <a:solidFill>
                   <a:srgbClr val="1C1C1A"/>
                 </a:solidFill>
@@ -5522,13 +5855,13 @@
       </p:sp>
       <p:sp>
         <p:nvSpPr>
-          <p:cNvPr id="5" name="TextBox 4"/>
-          <p:cNvSpPr txBox="1"/>
-          <p:nvPr/>
-        </p:nvSpPr>
-        <p:spPr>
-          <a:xfrm>
-            <a:off x="777240" y="6263640"/>
+          <p:cNvPr id="7" name="TextBox 6"/>
+          <p:cNvSpPr txBox="1"/>
+          <p:nvPr/>
+        </p:nvSpPr>
+        <p:spPr>
+          <a:xfrm>
+            <a:off x="777240" y="6309360"/>
             <a:ext cx="10607040" cy="365760"/>
           </a:xfrm>
           <a:prstGeom prst="rect">
@@ -5659,7 +5992,7 @@
         <p:spPr>
           <a:xfrm>
             <a:off x="777240" y="1965960"/>
-            <a:ext cx="10607040" cy="4206240"/>
+            <a:ext cx="10607040" cy="1856231"/>
           </a:xfrm>
           <a:prstGeom prst="rect">
             <a:avLst/>
@@ -5678,7 +6011,7 @@
               </a:spcAft>
             </a:pPr>
             <a:r>
-              <a:rPr sz="2100">
+              <a:rPr sz="2100" b="0">
                 <a:solidFill>
                   <a:srgbClr val="1C1C1A"/>
                 </a:solidFill>
@@ -5694,7 +6027,7 @@
               </a:spcAft>
             </a:pPr>
             <a:r>
-              <a:rPr sz="2100">
+              <a:rPr sz="2100" b="0">
                 <a:solidFill>
                   <a:srgbClr val="1C1C1A"/>
                 </a:solidFill>
@@ -5710,7 +6043,7 @@
               </a:spcAft>
             </a:pPr>
             <a:r>
-              <a:rPr sz="2100">
+              <a:rPr sz="2100" b="0">
                 <a:solidFill>
                   <a:srgbClr val="1C1C1A"/>
                 </a:solidFill>
@@ -5726,7 +6059,7 @@
               </a:spcAft>
             </a:pPr>
             <a:r>
-              <a:rPr sz="2100">
+              <a:rPr sz="2100" b="0">
                 <a:solidFill>
                   <a:srgbClr val="1C1C1A"/>
                 </a:solidFill>
@@ -5745,7 +6078,7 @@
         </p:nvSpPr>
         <p:spPr>
           <a:xfrm>
-            <a:off x="777240" y="6263640"/>
+            <a:off x="777240" y="6309360"/>
             <a:ext cx="10607040" cy="365760"/>
           </a:xfrm>
           <a:prstGeom prst="rect">
@@ -5877,7 +6210,7 @@
         <p:spPr>
           <a:xfrm>
             <a:off x="777240" y="1965960"/>
-            <a:ext cx="10607040" cy="4206240"/>
+            <a:ext cx="10607040" cy="1088136"/>
           </a:xfrm>
           <a:prstGeom prst="rect">
             <a:avLst/>
@@ -5896,13 +6229,31 @@
               </a:spcAft>
             </a:pPr>
             <a:r>
-              <a:rPr sz="2100">
+              <a:rPr sz="2100" b="0">
                 <a:solidFill>
                   <a:srgbClr val="FFFFFF"/>
                 </a:solidFill>
                 <a:latin typeface="Calibri"/>
               </a:rPr>
-              <a:t>[profile the columns] &gt; [decide per field] &gt; **[find the hidden rows]** &gt; [investigate the extremes] &gt; [ship with the log]</a:t>
+              <a:t>[profile the columns] &gt; [decide per field] &gt; </a:t>
+            </a:r>
+            <a:r>
+              <a:rPr sz="2100" b="1">
+                <a:solidFill>
+                  <a:srgbClr val="FFFFFF"/>
+                </a:solidFill>
+                <a:latin typeface="Calibri"/>
+              </a:rPr>
+              <a:t>[find the hidden rows]</a:t>
+            </a:r>
+            <a:r>
+              <a:rPr sz="2100" b="0">
+                <a:solidFill>
+                  <a:srgbClr val="FFFFFF"/>
+                </a:solidFill>
+                <a:latin typeface="Calibri"/>
+              </a:rPr>
+              <a:t> &gt; [investigate the extremes] &gt; [ship with the log]</a:t>
             </a:r>
           </a:p>
           <a:p>
@@ -5912,7 +6263,7 @@
               </a:spcAft>
             </a:pPr>
             <a:r>
-              <a:rPr sz="2100">
+              <a:rPr sz="2100" b="0">
                 <a:solidFill>
                   <a:srgbClr val="FFFFFF"/>
                 </a:solidFill>
@@ -5931,7 +6282,7 @@
         </p:nvSpPr>
         <p:spPr>
           <a:xfrm>
-            <a:off x="777240" y="6263640"/>
+            <a:off x="777240" y="6309360"/>
             <a:ext cx="10607040" cy="365760"/>
           </a:xfrm>
           <a:prstGeom prst="rect">
@@ -6062,7 +6413,7 @@
         <p:spPr>
           <a:xfrm>
             <a:off x="777240" y="1965960"/>
-            <a:ext cx="10607040" cy="4206240"/>
+            <a:ext cx="10607040" cy="704088"/>
           </a:xfrm>
           <a:prstGeom prst="rect">
             <a:avLst/>
@@ -6081,7 +6432,7 @@
               </a:spcAft>
             </a:pPr>
             <a:r>
-              <a:rPr sz="1700">
+              <a:rPr sz="1700" b="0">
                 <a:solidFill>
                   <a:srgbClr val="2B4A7D"/>
                 </a:solidFill>
@@ -6090,6 +6441,29 @@
               <a:t>duplicate rows by whole-record comparison: 0</a:t>
             </a:r>
           </a:p>
+        </p:txBody>
+      </p:sp>
+      <p:sp>
+        <p:nvSpPr>
+          <p:cNvPr id="5" name="TextBox 4"/>
+          <p:cNvSpPr txBox="1"/>
+          <p:nvPr/>
+        </p:nvSpPr>
+        <p:spPr>
+          <a:xfrm>
+            <a:off x="777240" y="2807208"/>
+            <a:ext cx="10607040" cy="704088"/>
+          </a:xfrm>
+          <a:prstGeom prst="rect">
+            <a:avLst/>
+          </a:prstGeom>
+          <a:noFill/>
+        </p:spPr>
+        <p:txBody>
+          <a:bodyPr wrap="square">
+            <a:spAutoFit/>
+          </a:bodyPr>
+          <a:lstStyle/>
           <a:p>
             <a:pPr>
               <a:spcAft>
@@ -6097,7 +6471,7 @@
               </a:spcAft>
             </a:pPr>
             <a:r>
-              <a:rPr sz="2100">
+              <a:rPr sz="2100" b="0">
                 <a:solidFill>
                   <a:srgbClr val="1C1C1A"/>
                 </a:solidFill>
@@ -6110,13 +6484,13 @@
       </p:sp>
       <p:sp>
         <p:nvSpPr>
-          <p:cNvPr id="5" name="TextBox 4"/>
-          <p:cNvSpPr txBox="1"/>
-          <p:nvPr/>
-        </p:nvSpPr>
-        <p:spPr>
-          <a:xfrm>
-            <a:off x="777240" y="6263640"/>
+          <p:cNvPr id="6" name="TextBox 5"/>
+          <p:cNvSpPr txBox="1"/>
+          <p:nvPr/>
+        </p:nvSpPr>
+        <p:spPr>
+          <a:xfrm>
+            <a:off x="777240" y="6309360"/>
             <a:ext cx="10607040" cy="365760"/>
           </a:xfrm>
           <a:prstGeom prst="rect">
@@ -6247,7 +6621,7 @@
         <p:spPr>
           <a:xfrm>
             <a:off x="777240" y="1965960"/>
-            <a:ext cx="10607040" cy="4206240"/>
+            <a:ext cx="10607040" cy="704088"/>
           </a:xfrm>
           <a:prstGeom prst="rect">
             <a:avLst/>
@@ -6266,7 +6640,7 @@
               </a:spcAft>
             </a:pPr>
             <a:r>
-              <a:rPr sz="1700">
+              <a:rPr sz="1700" b="0">
                 <a:solidFill>
                   <a:srgbClr val="2B4A7D"/>
                 </a:solidFill>
@@ -6275,6 +6649,29 @@
               <a:t>distinct order_ids: 49 across 50 rows</a:t>
             </a:r>
           </a:p>
+        </p:txBody>
+      </p:sp>
+      <p:sp>
+        <p:nvSpPr>
+          <p:cNvPr id="5" name="TextBox 4"/>
+          <p:cNvSpPr txBox="1"/>
+          <p:nvPr/>
+        </p:nvSpPr>
+        <p:spPr>
+          <a:xfrm>
+            <a:off x="777240" y="2807208"/>
+            <a:ext cx="10607040" cy="704088"/>
+          </a:xfrm>
+          <a:prstGeom prst="rect">
+            <a:avLst/>
+          </a:prstGeom>
+          <a:noFill/>
+        </p:spPr>
+        <p:txBody>
+          <a:bodyPr wrap="square">
+            <a:spAutoFit/>
+          </a:bodyPr>
+          <a:lstStyle/>
           <a:p>
             <a:pPr>
               <a:spcAft>
@@ -6282,7 +6679,7 @@
               </a:spcAft>
             </a:pPr>
             <a:r>
-              <a:rPr sz="2100">
+              <a:rPr sz="2100" b="0">
                 <a:solidFill>
                   <a:srgbClr val="1C1C1A"/>
                 </a:solidFill>
@@ -6295,13 +6692,13 @@
       </p:sp>
       <p:sp>
         <p:nvSpPr>
-          <p:cNvPr id="5" name="TextBox 4"/>
-          <p:cNvSpPr txBox="1"/>
-          <p:nvPr/>
-        </p:nvSpPr>
-        <p:spPr>
-          <a:xfrm>
-            <a:off x="777240" y="6263640"/>
+          <p:cNvPr id="6" name="TextBox 5"/>
+          <p:cNvSpPr txBox="1"/>
+          <p:nvPr/>
+        </p:nvSpPr>
+        <p:spPr>
+          <a:xfrm>
+            <a:off x="777240" y="6309360"/>
             <a:ext cx="10607040" cy="365760"/>
           </a:xfrm>
           <a:prstGeom prst="rect">
@@ -6432,7 +6829,7 @@
         <p:spPr>
           <a:xfrm>
             <a:off x="777240" y="1965960"/>
-            <a:ext cx="10607040" cy="4206240"/>
+            <a:ext cx="10607040" cy="1088136"/>
           </a:xfrm>
           <a:prstGeom prst="rect">
             <a:avLst/>
@@ -6451,7 +6848,7 @@
               </a:spcAft>
             </a:pPr>
             <a:r>
-              <a:rPr sz="1700">
+              <a:rPr sz="1700" b="0">
                 <a:solidFill>
                   <a:srgbClr val="2B4A7D"/>
                 </a:solidFill>
@@ -6467,7 +6864,7 @@
               </a:spcAft>
             </a:pPr>
             <a:r>
-              <a:rPr sz="1700">
+              <a:rPr sz="1700" b="0">
                 <a:solidFill>
                   <a:srgbClr val="2B4A7D"/>
                 </a:solidFill>
@@ -6476,6 +6873,29 @@
               <a:t>KR4201  Retail-Core  1865  returned  2026-09-14</a:t>
             </a:r>
           </a:p>
+        </p:txBody>
+      </p:sp>
+      <p:sp>
+        <p:nvSpPr>
+          <p:cNvPr id="5" name="TextBox 4"/>
+          <p:cNvSpPr txBox="1"/>
+          <p:nvPr/>
+        </p:nvSpPr>
+        <p:spPr>
+          <a:xfrm>
+            <a:off x="777240" y="3191256"/>
+            <a:ext cx="10607040" cy="704088"/>
+          </a:xfrm>
+          <a:prstGeom prst="rect">
+            <a:avLst/>
+          </a:prstGeom>
+          <a:noFill/>
+        </p:spPr>
+        <p:txBody>
+          <a:bodyPr wrap="square">
+            <a:spAutoFit/>
+          </a:bodyPr>
+          <a:lstStyle/>
           <a:p>
             <a:pPr>
               <a:spcAft>
@@ -6483,7 +6903,7 @@
               </a:spcAft>
             </a:pPr>
             <a:r>
-              <a:rPr sz="2100">
+              <a:rPr sz="2100" b="0">
                 <a:solidFill>
                   <a:srgbClr val="1C1C1A"/>
                 </a:solidFill>
@@ -6496,13 +6916,13 @@
       </p:sp>
       <p:sp>
         <p:nvSpPr>
-          <p:cNvPr id="5" name="TextBox 4"/>
-          <p:cNvSpPr txBox="1"/>
-          <p:nvPr/>
-        </p:nvSpPr>
-        <p:spPr>
-          <a:xfrm>
-            <a:off x="777240" y="6263640"/>
+          <p:cNvPr id="6" name="TextBox 5"/>
+          <p:cNvSpPr txBox="1"/>
+          <p:nvPr/>
+        </p:nvSpPr>
+        <p:spPr>
+          <a:xfrm>
+            <a:off x="777240" y="6309360"/>
             <a:ext cx="10607040" cy="365760"/>
           </a:xfrm>
           <a:prstGeom prst="rect">
@@ -6633,7 +7053,7 @@
         <p:spPr>
           <a:xfrm>
             <a:off x="777240" y="1965960"/>
-            <a:ext cx="10607040" cy="4206240"/>
+            <a:ext cx="10607040" cy="1472184"/>
           </a:xfrm>
           <a:prstGeom prst="rect">
             <a:avLst/>
@@ -6652,7 +7072,7 @@
               </a:spcAft>
             </a:pPr>
             <a:r>
-              <a:rPr sz="2100">
+              <a:rPr sz="2100" b="0">
                 <a:solidFill>
                   <a:srgbClr val="1C1C1A"/>
                 </a:solidFill>
@@ -6668,7 +7088,7 @@
               </a:spcAft>
             </a:pPr>
             <a:r>
-              <a:rPr sz="2100">
+              <a:rPr sz="2100" b="0">
                 <a:solidFill>
                   <a:srgbClr val="1C1C1A"/>
                 </a:solidFill>
@@ -6684,7 +7104,7 @@
               </a:spcAft>
             </a:pPr>
             <a:r>
-              <a:rPr sz="2100">
+              <a:rPr sz="2100" b="0">
                 <a:solidFill>
                   <a:srgbClr val="1C1C1A"/>
                 </a:solidFill>
@@ -6703,7 +7123,7 @@
         </p:nvSpPr>
         <p:spPr>
           <a:xfrm>
-            <a:off x="777240" y="6263640"/>
+            <a:off x="777240" y="6309360"/>
             <a:ext cx="10607040" cy="365760"/>
           </a:xfrm>
           <a:prstGeom prst="rect">
@@ -6834,7 +7254,7 @@
         <p:spPr>
           <a:xfrm>
             <a:off x="777240" y="1965960"/>
-            <a:ext cx="10607040" cy="4206240"/>
+            <a:ext cx="10607040" cy="1472184"/>
           </a:xfrm>
           <a:prstGeom prst="rect">
             <a:avLst/>
@@ -6853,7 +7273,7 @@
               </a:spcAft>
             </a:pPr>
             <a:r>
-              <a:rPr sz="2100">
+              <a:rPr sz="2100" b="0">
                 <a:solidFill>
                   <a:srgbClr val="1C1C1A"/>
                 </a:solidFill>
@@ -6869,7 +7289,7 @@
               </a:spcAft>
             </a:pPr>
             <a:r>
-              <a:rPr sz="2100">
+              <a:rPr sz="2100" b="0">
                 <a:solidFill>
                   <a:srgbClr val="1C1C1A"/>
                 </a:solidFill>
@@ -6885,7 +7305,7 @@
               </a:spcAft>
             </a:pPr>
             <a:r>
-              <a:rPr sz="2100">
+              <a:rPr sz="2100" b="0">
                 <a:solidFill>
                   <a:srgbClr val="1C1C1A"/>
                 </a:solidFill>
@@ -6904,7 +7324,7 @@
         </p:nvSpPr>
         <p:spPr>
           <a:xfrm>
-            <a:off x="777240" y="6263640"/>
+            <a:off x="777240" y="6309360"/>
             <a:ext cx="10607040" cy="365760"/>
           </a:xfrm>
           <a:prstGeom prst="rect">
@@ -7035,7 +7455,7 @@
         <p:spPr>
           <a:xfrm>
             <a:off x="777240" y="1965960"/>
-            <a:ext cx="10607040" cy="4206240"/>
+            <a:ext cx="10607040" cy="1088136"/>
           </a:xfrm>
           <a:prstGeom prst="rect">
             <a:avLst/>
@@ -7054,7 +7474,7 @@
               </a:spcAft>
             </a:pPr>
             <a:r>
-              <a:rPr sz="2100">
+              <a:rPr sz="2100" b="0">
                 <a:solidFill>
                   <a:srgbClr val="1C1C1A"/>
                 </a:solidFill>
@@ -7070,7 +7490,7 @@
               </a:spcAft>
             </a:pPr>
             <a:r>
-              <a:rPr sz="2100">
+              <a:rPr sz="2100" b="0">
                 <a:solidFill>
                   <a:srgbClr val="1C1C1A"/>
                 </a:solidFill>
@@ -7089,7 +7509,7 @@
         </p:nvSpPr>
         <p:spPr>
           <a:xfrm>
-            <a:off x="777240" y="6263640"/>
+            <a:off x="777240" y="6309360"/>
             <a:ext cx="10607040" cy="365760"/>
           </a:xfrm>
           <a:prstGeom prst="rect">
@@ -7220,7 +7640,7 @@
         <p:spPr>
           <a:xfrm>
             <a:off x="777240" y="1965960"/>
-            <a:ext cx="10607040" cy="4206240"/>
+            <a:ext cx="10607040" cy="1856231"/>
           </a:xfrm>
           <a:prstGeom prst="rect">
             <a:avLst/>
@@ -7239,7 +7659,7 @@
               </a:spcAft>
             </a:pPr>
             <a:r>
-              <a:rPr sz="2100">
+              <a:rPr sz="2100" b="0">
                 <a:solidFill>
                   <a:srgbClr val="1C1C1A"/>
                 </a:solidFill>
@@ -7255,7 +7675,7 @@
               </a:spcAft>
             </a:pPr>
             <a:r>
-              <a:rPr sz="2100">
+              <a:rPr sz="2100" b="0">
                 <a:solidFill>
                   <a:srgbClr val="1C1C1A"/>
                 </a:solidFill>
@@ -7271,7 +7691,7 @@
               </a:spcAft>
             </a:pPr>
             <a:r>
-              <a:rPr sz="2100">
+              <a:rPr sz="2100" b="0">
                 <a:solidFill>
                   <a:srgbClr val="1C1C1A"/>
                 </a:solidFill>
@@ -7287,7 +7707,7 @@
               </a:spcAft>
             </a:pPr>
             <a:r>
-              <a:rPr sz="2100">
+              <a:rPr sz="2100" b="0">
                 <a:solidFill>
                   <a:srgbClr val="1C1C1A"/>
                 </a:solidFill>
@@ -7306,7 +7726,7 @@
         </p:nvSpPr>
         <p:spPr>
           <a:xfrm>
-            <a:off x="777240" y="6263640"/>
+            <a:off x="777240" y="6309360"/>
             <a:ext cx="10607040" cy="365760"/>
           </a:xfrm>
           <a:prstGeom prst="rect">
@@ -7438,7 +7858,7 @@
         <p:spPr>
           <a:xfrm>
             <a:off x="777240" y="1965960"/>
-            <a:ext cx="10607040" cy="4206240"/>
+            <a:ext cx="10607040" cy="704088"/>
           </a:xfrm>
           <a:prstGeom prst="rect">
             <a:avLst/>
@@ -7457,13 +7877,31 @@
               </a:spcAft>
             </a:pPr>
             <a:r>
-              <a:rPr sz="2100">
+              <a:rPr sz="2100" b="0">
                 <a:solidFill>
                   <a:srgbClr val="FFFFFF"/>
                 </a:solidFill>
                 <a:latin typeface="Calibri"/>
               </a:rPr>
-              <a:t>[profile the columns] &gt; [decide per field] &gt; [find the hidden rows] &gt; **[investigate the extremes]** &gt; [ship with the log]</a:t>
+              <a:t>[profile the columns] &gt; [decide per field] &gt; [find the hidden rows] &gt; </a:t>
+            </a:r>
+            <a:r>
+              <a:rPr sz="2100" b="1">
+                <a:solidFill>
+                  <a:srgbClr val="FFFFFF"/>
+                </a:solidFill>
+                <a:latin typeface="Calibri"/>
+              </a:rPr>
+              <a:t>[investigate the extremes]</a:t>
+            </a:r>
+            <a:r>
+              <a:rPr sz="2100" b="0">
+                <a:solidFill>
+                  <a:srgbClr val="FFFFFF"/>
+                </a:solidFill>
+                <a:latin typeface="Calibri"/>
+              </a:rPr>
+              <a:t> &gt; [ship with the log]</a:t>
             </a:r>
           </a:p>
         </p:txBody>
@@ -7476,7 +7914,7 @@
         </p:nvSpPr>
         <p:spPr>
           <a:xfrm>
-            <a:off x="777240" y="6263640"/>
+            <a:off x="777240" y="6309360"/>
             <a:ext cx="10607040" cy="365760"/>
           </a:xfrm>
           <a:prstGeom prst="rect">
@@ -7607,7 +8045,7 @@
         <p:spPr>
           <a:xfrm>
             <a:off x="777240" y="1965960"/>
-            <a:ext cx="10607040" cy="4206240"/>
+            <a:ext cx="10607040" cy="1088136"/>
           </a:xfrm>
           <a:prstGeom prst="rect">
             <a:avLst/>
@@ -7626,7 +8064,7 @@
               </a:spcAft>
             </a:pPr>
             <a:r>
-              <a:rPr sz="2100">
+              <a:rPr sz="2100" b="0">
                 <a:solidFill>
                   <a:srgbClr val="1C1C1A"/>
                 </a:solidFill>
@@ -7642,7 +8080,7 @@
               </a:spcAft>
             </a:pPr>
             <a:r>
-              <a:rPr sz="2100">
+              <a:rPr sz="2100" b="0">
                 <a:solidFill>
                   <a:srgbClr val="1C1C1A"/>
                 </a:solidFill>
@@ -7661,7 +8099,7 @@
         </p:nvSpPr>
         <p:spPr>
           <a:xfrm>
-            <a:off x="777240" y="6263640"/>
+            <a:off x="777240" y="6309360"/>
             <a:ext cx="10607040" cy="365760"/>
           </a:xfrm>
           <a:prstGeom prst="rect">
@@ -7792,7 +8230,7 @@
         <p:spPr>
           <a:xfrm>
             <a:off x="777240" y="1965960"/>
-            <a:ext cx="10607040" cy="4206240"/>
+            <a:ext cx="10607040" cy="704088"/>
           </a:xfrm>
           <a:prstGeom prst="rect">
             <a:avLst/>
@@ -7811,7 +8249,7 @@
               </a:spcAft>
             </a:pPr>
             <a:r>
-              <a:rPr sz="1700">
+              <a:rPr sz="1700" b="0">
                 <a:solidFill>
                   <a:srgbClr val="2B4A7D"/>
                 </a:solidFill>
@@ -7820,6 +8258,29 @@
               <a:t>... 2895, 2930, 2990, 2995, 480000</a:t>
             </a:r>
           </a:p>
+        </p:txBody>
+      </p:sp>
+      <p:sp>
+        <p:nvSpPr>
+          <p:cNvPr id="5" name="TextBox 4"/>
+          <p:cNvSpPr txBox="1"/>
+          <p:nvPr/>
+        </p:nvSpPr>
+        <p:spPr>
+          <a:xfrm>
+            <a:off x="777240" y="2807208"/>
+            <a:ext cx="10607040" cy="704088"/>
+          </a:xfrm>
+          <a:prstGeom prst="rect">
+            <a:avLst/>
+          </a:prstGeom>
+          <a:noFill/>
+        </p:spPr>
+        <p:txBody>
+          <a:bodyPr wrap="square">
+            <a:spAutoFit/>
+          </a:bodyPr>
+          <a:lstStyle/>
           <a:p>
             <a:pPr>
               <a:spcAft>
@@ -7827,7 +8288,7 @@
               </a:spcAft>
             </a:pPr>
             <a:r>
-              <a:rPr sz="2100">
+              <a:rPr sz="2100" b="0">
                 <a:solidFill>
                   <a:srgbClr val="1C1C1A"/>
                 </a:solidFill>
@@ -7840,13 +8301,13 @@
       </p:sp>
       <p:sp>
         <p:nvSpPr>
-          <p:cNvPr id="5" name="TextBox 4"/>
-          <p:cNvSpPr txBox="1"/>
-          <p:nvPr/>
-        </p:nvSpPr>
-        <p:spPr>
-          <a:xfrm>
-            <a:off x="777240" y="6263640"/>
+          <p:cNvPr id="6" name="TextBox 5"/>
+          <p:cNvSpPr txBox="1"/>
+          <p:nvPr/>
+        </p:nvSpPr>
+        <p:spPr>
+          <a:xfrm>
+            <a:off x="777240" y="6309360"/>
             <a:ext cx="10607040" cy="365760"/>
           </a:xfrm>
           <a:prstGeom prst="rect">
@@ -7977,7 +8438,7 @@
         <p:spPr>
           <a:xfrm>
             <a:off x="777240" y="1965960"/>
-            <a:ext cx="10607040" cy="4206240"/>
+            <a:ext cx="10607040" cy="1472184"/>
           </a:xfrm>
           <a:prstGeom prst="rect">
             <a:avLst/>
@@ -7996,7 +8457,7 @@
               </a:spcAft>
             </a:pPr>
             <a:r>
-              <a:rPr sz="2100">
+              <a:rPr sz="2100" b="0">
                 <a:solidFill>
                   <a:srgbClr val="1C1C1A"/>
                 </a:solidFill>
@@ -8012,7 +8473,7 @@
               </a:spcAft>
             </a:pPr>
             <a:r>
-              <a:rPr sz="2100">
+              <a:rPr sz="2100" b="0">
                 <a:solidFill>
                   <a:srgbClr val="1C1C1A"/>
                 </a:solidFill>
@@ -8028,7 +8489,7 @@
               </a:spcAft>
             </a:pPr>
             <a:r>
-              <a:rPr sz="2100">
+              <a:rPr sz="2100" b="0">
                 <a:solidFill>
                   <a:srgbClr val="1C1C1A"/>
                 </a:solidFill>
@@ -8047,7 +8508,7 @@
         </p:nvSpPr>
         <p:spPr>
           <a:xfrm>
-            <a:off x="777240" y="6263640"/>
+            <a:off x="777240" y="6309360"/>
             <a:ext cx="10607040" cy="365760"/>
           </a:xfrm>
           <a:prstGeom prst="rect">
@@ -8178,7 +8639,7 @@
         <p:spPr>
           <a:xfrm>
             <a:off x="777240" y="1965960"/>
-            <a:ext cx="10607040" cy="4206240"/>
+            <a:ext cx="10607040" cy="1088136"/>
           </a:xfrm>
           <a:prstGeom prst="rect">
             <a:avLst/>
@@ -8197,7 +8658,7 @@
               </a:spcAft>
             </a:pPr>
             <a:r>
-              <a:rPr sz="2100">
+              <a:rPr sz="2100" b="0">
                 <a:solidFill>
                   <a:srgbClr val="1C1C1A"/>
                 </a:solidFill>
@@ -8213,7 +8674,7 @@
               </a:spcAft>
             </a:pPr>
             <a:r>
-              <a:rPr sz="2100">
+              <a:rPr sz="2100" b="0">
                 <a:solidFill>
                   <a:srgbClr val="1C1C1A"/>
                 </a:solidFill>
@@ -8232,7 +8693,7 @@
         </p:nvSpPr>
         <p:spPr>
           <a:xfrm>
-            <a:off x="777240" y="6263640"/>
+            <a:off x="777240" y="6309360"/>
             <a:ext cx="10607040" cy="365760"/>
           </a:xfrm>
           <a:prstGeom prst="rect">
@@ -8363,7 +8824,7 @@
         <p:spPr>
           <a:xfrm>
             <a:off x="777240" y="1965960"/>
-            <a:ext cx="10607040" cy="4206240"/>
+            <a:ext cx="10607040" cy="1088136"/>
           </a:xfrm>
           <a:prstGeom prst="rect">
             <a:avLst/>
@@ -8382,7 +8843,7 @@
               </a:spcAft>
             </a:pPr>
             <a:r>
-              <a:rPr sz="2100">
+              <a:rPr sz="2100" b="0">
                 <a:solidFill>
                   <a:srgbClr val="1C1C1A"/>
                 </a:solidFill>
@@ -8398,7 +8859,7 @@
               </a:spcAft>
             </a:pPr>
             <a:r>
-              <a:rPr sz="2100">
+              <a:rPr sz="2100" b="0">
                 <a:solidFill>
                   <a:srgbClr val="1C1C1A"/>
                 </a:solidFill>
@@ -8417,7 +8878,7 @@
         </p:nvSpPr>
         <p:spPr>
           <a:xfrm>
-            <a:off x="777240" y="6263640"/>
+            <a:off x="777240" y="6309360"/>
             <a:ext cx="10607040" cy="365760"/>
           </a:xfrm>
           <a:prstGeom prst="rect">
@@ -8548,7 +9009,7 @@
         <p:spPr>
           <a:xfrm>
             <a:off x="777240" y="1965960"/>
-            <a:ext cx="10607040" cy="4206240"/>
+            <a:ext cx="10607040" cy="1856231"/>
           </a:xfrm>
           <a:prstGeom prst="rect">
             <a:avLst/>
@@ -8567,7 +9028,7 @@
               </a:spcAft>
             </a:pPr>
             <a:r>
-              <a:rPr sz="2100">
+              <a:rPr sz="2100" b="0">
                 <a:solidFill>
                   <a:srgbClr val="1C1C1A"/>
                 </a:solidFill>
@@ -8583,7 +9044,7 @@
               </a:spcAft>
             </a:pPr>
             <a:r>
-              <a:rPr sz="2100">
+              <a:rPr sz="2100" b="0">
                 <a:solidFill>
                   <a:srgbClr val="1C1C1A"/>
                 </a:solidFill>
@@ -8599,7 +9060,7 @@
               </a:spcAft>
             </a:pPr>
             <a:r>
-              <a:rPr sz="2100">
+              <a:rPr sz="2100" b="0">
                 <a:solidFill>
                   <a:srgbClr val="1C1C1A"/>
                 </a:solidFill>
@@ -8615,7 +9076,7 @@
               </a:spcAft>
             </a:pPr>
             <a:r>
-              <a:rPr sz="2100">
+              <a:rPr sz="2100" b="0">
                 <a:solidFill>
                   <a:srgbClr val="1C1C1A"/>
                 </a:solidFill>
@@ -8634,7 +9095,7 @@
         </p:nvSpPr>
         <p:spPr>
           <a:xfrm>
-            <a:off x="777240" y="6263640"/>
+            <a:off x="777240" y="6309360"/>
             <a:ext cx="10607040" cy="365760"/>
           </a:xfrm>
           <a:prstGeom prst="rect">
@@ -8766,7 +9227,7 @@
         <p:spPr>
           <a:xfrm>
             <a:off x="777240" y="1965960"/>
-            <a:ext cx="10607040" cy="4206240"/>
+            <a:ext cx="10607040" cy="704088"/>
           </a:xfrm>
           <a:prstGeom prst="rect">
             <a:avLst/>
@@ -8785,13 +9246,22 @@
               </a:spcAft>
             </a:pPr>
             <a:r>
-              <a:rPr sz="2100">
+              <a:rPr sz="2100" b="0">
                 <a:solidFill>
                   <a:srgbClr val="FFFFFF"/>
                 </a:solidFill>
                 <a:latin typeface="Calibri"/>
               </a:rPr>
-              <a:t>[profile the columns] &gt; [decide per field] &gt; [find the hidden rows] &gt; [investigate the extremes] &gt; **[ship with the log]**</a:t>
+              <a:t>[profile the columns] &gt; [decide per field] &gt; [find the hidden rows] &gt; [investigate the extremes] &gt; </a:t>
+            </a:r>
+            <a:r>
+              <a:rPr sz="2100" b="1">
+                <a:solidFill>
+                  <a:srgbClr val="FFFFFF"/>
+                </a:solidFill>
+                <a:latin typeface="Calibri"/>
+              </a:rPr>
+              <a:t>[ship with the log]</a:t>
             </a:r>
           </a:p>
         </p:txBody>
@@ -8804,7 +9274,7 @@
         </p:nvSpPr>
         <p:spPr>
           <a:xfrm>
-            <a:off x="777240" y="6263640"/>
+            <a:off x="777240" y="6309360"/>
             <a:ext cx="10607040" cy="365760"/>
           </a:xfrm>
           <a:prstGeom prst="rect">
@@ -8935,7 +9405,7 @@
         <p:spPr>
           <a:xfrm>
             <a:off x="777240" y="1965960"/>
-            <a:ext cx="10607040" cy="4206240"/>
+            <a:ext cx="10607040" cy="1088136"/>
           </a:xfrm>
           <a:prstGeom prst="rect">
             <a:avLst/>
@@ -8954,7 +9424,7 @@
               </a:spcAft>
             </a:pPr>
             <a:r>
-              <a:rPr sz="1700">
+              <a:rPr sz="1700" b="0">
                 <a:solidFill>
                   <a:srgbClr val="2B4A7D"/>
                 </a:solidFill>
@@ -8970,7 +9440,7 @@
               </a:spcAft>
             </a:pPr>
             <a:r>
-              <a:rPr sz="1700">
+              <a:rPr sz="1700" b="0">
                 <a:solidFill>
                   <a:srgbClr val="2B4A7D"/>
                 </a:solidFill>
@@ -8979,6 +9449,29 @@
               <a:t>the decisions log        every change, and why you made it</a:t>
             </a:r>
           </a:p>
+        </p:txBody>
+      </p:sp>
+      <p:sp>
+        <p:nvSpPr>
+          <p:cNvPr id="5" name="TextBox 4"/>
+          <p:cNvSpPr txBox="1"/>
+          <p:nvPr/>
+        </p:nvSpPr>
+        <p:spPr>
+          <a:xfrm>
+            <a:off x="777240" y="3191256"/>
+            <a:ext cx="10607040" cy="704088"/>
+          </a:xfrm>
+          <a:prstGeom prst="rect">
+            <a:avLst/>
+          </a:prstGeom>
+          <a:noFill/>
+        </p:spPr>
+        <p:txBody>
+          <a:bodyPr wrap="square">
+            <a:spAutoFit/>
+          </a:bodyPr>
+          <a:lstStyle/>
           <a:p>
             <a:pPr>
               <a:spcAft>
@@ -8986,7 +9479,7 @@
               </a:spcAft>
             </a:pPr>
             <a:r>
-              <a:rPr sz="2100">
+              <a:rPr sz="2100" b="0">
                 <a:solidFill>
                   <a:srgbClr val="1C1C1A"/>
                 </a:solidFill>
@@ -8999,13 +9492,13 @@
       </p:sp>
       <p:sp>
         <p:nvSpPr>
-          <p:cNvPr id="5" name="TextBox 4"/>
-          <p:cNvSpPr txBox="1"/>
-          <p:nvPr/>
-        </p:nvSpPr>
-        <p:spPr>
-          <a:xfrm>
-            <a:off x="777240" y="6263640"/>
+          <p:cNvPr id="6" name="TextBox 5"/>
+          <p:cNvSpPr txBox="1"/>
+          <p:nvPr/>
+        </p:nvSpPr>
+        <p:spPr>
+          <a:xfrm>
+            <a:off x="777240" y="6309360"/>
             <a:ext cx="10607040" cy="365760"/>
           </a:xfrm>
           <a:prstGeom prst="rect">
@@ -9136,7 +9629,7 @@
         <p:spPr>
           <a:xfrm>
             <a:off x="777240" y="1965960"/>
-            <a:ext cx="10607040" cy="4206240"/>
+            <a:ext cx="10607040" cy="1856231"/>
           </a:xfrm>
           <a:prstGeom prst="rect">
             <a:avLst/>
@@ -9155,7 +9648,7 @@
               </a:spcAft>
             </a:pPr>
             <a:r>
-              <a:rPr sz="1700">
+              <a:rPr sz="1700" b="0">
                 <a:solidFill>
                   <a:srgbClr val="2B4A7D"/>
                 </a:solidFill>
@@ -9171,7 +9664,7 @@
               </a:spcAft>
             </a:pPr>
             <a:r>
-              <a:rPr sz="1700">
+              <a:rPr sz="1700" b="0">
                 <a:solidFill>
                   <a:srgbClr val="2B4A7D"/>
                 </a:solidFill>
@@ -9187,7 +9680,7 @@
               </a:spcAft>
             </a:pPr>
             <a:r>
-              <a:rPr sz="1700">
+              <a:rPr sz="1700" b="0">
                 <a:solidFill>
                   <a:srgbClr val="2B4A7D"/>
                 </a:solidFill>
@@ -9203,7 +9696,7 @@
               </a:spcAft>
             </a:pPr>
             <a:r>
-              <a:rPr sz="1700">
+              <a:rPr sz="1700" b="0">
                 <a:solidFill>
                   <a:srgbClr val="2B4A7D"/>
                 </a:solidFill>
@@ -9212,6 +9705,29 @@
               <a:t>480000, extreme amount       -&gt; kept, converts cleanly, raised with the owner</a:t>
             </a:r>
           </a:p>
+        </p:txBody>
+      </p:sp>
+      <p:sp>
+        <p:nvSpPr>
+          <p:cNvPr id="5" name="TextBox 4"/>
+          <p:cNvSpPr txBox="1"/>
+          <p:nvPr/>
+        </p:nvSpPr>
+        <p:spPr>
+          <a:xfrm>
+            <a:off x="777240" y="3959352"/>
+            <a:ext cx="10607040" cy="704088"/>
+          </a:xfrm>
+          <a:prstGeom prst="rect">
+            <a:avLst/>
+          </a:prstGeom>
+          <a:noFill/>
+        </p:spPr>
+        <p:txBody>
+          <a:bodyPr wrap="square">
+            <a:spAutoFit/>
+          </a:bodyPr>
+          <a:lstStyle/>
           <a:p>
             <a:pPr>
               <a:spcAft>
@@ -9219,7 +9735,7 @@
               </a:spcAft>
             </a:pPr>
             <a:r>
-              <a:rPr sz="2100">
+              <a:rPr sz="2100" b="0">
                 <a:solidFill>
                   <a:srgbClr val="1C1C1A"/>
                 </a:solidFill>
@@ -9232,13 +9748,13 @@
       </p:sp>
       <p:sp>
         <p:nvSpPr>
-          <p:cNvPr id="5" name="TextBox 4"/>
-          <p:cNvSpPr txBox="1"/>
-          <p:nvPr/>
-        </p:nvSpPr>
-        <p:spPr>
-          <a:xfrm>
-            <a:off x="777240" y="6263640"/>
+          <p:cNvPr id="6" name="TextBox 5"/>
+          <p:cNvSpPr txBox="1"/>
+          <p:nvPr/>
+        </p:nvSpPr>
+        <p:spPr>
+          <a:xfrm>
+            <a:off x="777240" y="6309360"/>
             <a:ext cx="10607040" cy="365760"/>
           </a:xfrm>
           <a:prstGeom prst="rect">
@@ -9369,7 +9885,7 @@
         <p:spPr>
           <a:xfrm>
             <a:off x="777240" y="1965960"/>
-            <a:ext cx="10607040" cy="4206240"/>
+            <a:ext cx="10607040" cy="1088136"/>
           </a:xfrm>
           <a:prstGeom prst="rect">
             <a:avLst/>
@@ -9388,7 +9904,7 @@
               </a:spcAft>
             </a:pPr>
             <a:r>
-              <a:rPr sz="2100">
+              <a:rPr sz="2100" b="0">
                 <a:solidFill>
                   <a:srgbClr val="1C1C1A"/>
                 </a:solidFill>
@@ -9404,7 +9920,7 @@
               </a:spcAft>
             </a:pPr>
             <a:r>
-              <a:rPr sz="2100">
+              <a:rPr sz="2100" b="0">
                 <a:solidFill>
                   <a:srgbClr val="1C1C1A"/>
                 </a:solidFill>
@@ -9413,6 +9929,29 @@
               <a:t>Today it also has to survive drops, defaults and any dedupe you applied. Same check, more ways to fail it.</a:t>
             </a:r>
           </a:p>
+        </p:txBody>
+      </p:sp>
+      <p:sp>
+        <p:nvSpPr>
+          <p:cNvPr id="5" name="TextBox 4"/>
+          <p:cNvSpPr txBox="1"/>
+          <p:nvPr/>
+        </p:nvSpPr>
+        <p:spPr>
+          <a:xfrm>
+            <a:off x="777240" y="3191256"/>
+            <a:ext cx="10607040" cy="704088"/>
+          </a:xfrm>
+          <a:prstGeom prst="rect">
+            <a:avLst/>
+          </a:prstGeom>
+          <a:noFill/>
+        </p:spPr>
+        <p:txBody>
+          <a:bodyPr wrap="square">
+            <a:spAutoFit/>
+          </a:bodyPr>
+          <a:lstStyle/>
           <a:p>
             <a:pPr>
               <a:spcAft>
@@ -9420,7 +9959,7 @@
               </a:spcAft>
             </a:pPr>
             <a:r>
-              <a:rPr sz="1700">
+              <a:rPr sz="1700" b="0">
                 <a:solidFill>
                   <a:srgbClr val="2B4A7D"/>
                 </a:solidFill>
@@ -9433,13 +9972,13 @@
       </p:sp>
       <p:sp>
         <p:nvSpPr>
-          <p:cNvPr id="5" name="TextBox 4"/>
-          <p:cNvSpPr txBox="1"/>
-          <p:nvPr/>
-        </p:nvSpPr>
-        <p:spPr>
-          <a:xfrm>
-            <a:off x="777240" y="6263640"/>
+          <p:cNvPr id="6" name="TextBox 5"/>
+          <p:cNvSpPr txBox="1"/>
+          <p:nvPr/>
+        </p:nvSpPr>
+        <p:spPr>
+          <a:xfrm>
+            <a:off x="777240" y="6309360"/>
             <a:ext cx="10607040" cy="365760"/>
           </a:xfrm>
           <a:prstGeom prst="rect">
@@ -9570,7 +10109,7 @@
         <p:spPr>
           <a:xfrm>
             <a:off x="777240" y="1965960"/>
-            <a:ext cx="10607040" cy="4206240"/>
+            <a:ext cx="10607040" cy="1472184"/>
           </a:xfrm>
           <a:prstGeom prst="rect">
             <a:avLst/>
@@ -9589,7 +10128,7 @@
               </a:spcAft>
             </a:pPr>
             <a:r>
-              <a:rPr sz="2100">
+              <a:rPr sz="2100" b="0">
                 <a:solidFill>
                   <a:srgbClr val="1C1C1A"/>
                 </a:solidFill>
@@ -9605,7 +10144,7 @@
               </a:spcAft>
             </a:pPr>
             <a:r>
-              <a:rPr sz="2100">
+              <a:rPr sz="2100" b="0">
                 <a:solidFill>
                   <a:srgbClr val="1C1C1A"/>
                 </a:solidFill>
@@ -9621,7 +10160,7 @@
               </a:spcAft>
             </a:pPr>
             <a:r>
-              <a:rPr sz="2100">
+              <a:rPr sz="2100" b="0">
                 <a:solidFill>
                   <a:srgbClr val="1C1C1A"/>
                 </a:solidFill>
@@ -9640,7 +10179,7 @@
         </p:nvSpPr>
         <p:spPr>
           <a:xfrm>
-            <a:off x="777240" y="6263640"/>
+            <a:off x="777240" y="6309360"/>
             <a:ext cx="10607040" cy="365760"/>
           </a:xfrm>
           <a:prstGeom prst="rect">
@@ -9771,7 +10310,7 @@
         <p:spPr>
           <a:xfrm>
             <a:off x="777240" y="1965960"/>
-            <a:ext cx="10607040" cy="4206240"/>
+            <a:ext cx="10607040" cy="1472184"/>
           </a:xfrm>
           <a:prstGeom prst="rect">
             <a:avLst/>
@@ -9790,7 +10329,7 @@
               </a:spcAft>
             </a:pPr>
             <a:r>
-              <a:rPr sz="2100">
+              <a:rPr sz="2100" b="0">
                 <a:solidFill>
                   <a:srgbClr val="1C1C1A"/>
                 </a:solidFill>
@@ -9806,7 +10345,7 @@
               </a:spcAft>
             </a:pPr>
             <a:r>
-              <a:rPr sz="2100">
+              <a:rPr sz="2100" b="0">
                 <a:solidFill>
                   <a:srgbClr val="1C1C1A"/>
                 </a:solidFill>
@@ -9822,7 +10361,7 @@
               </a:spcAft>
             </a:pPr>
             <a:r>
-              <a:rPr sz="2100">
+              <a:rPr sz="2100" b="0">
                 <a:solidFill>
                   <a:srgbClr val="1C1C1A"/>
                 </a:solidFill>
@@ -9841,7 +10380,7 @@
         </p:nvSpPr>
         <p:spPr>
           <a:xfrm>
-            <a:off x="777240" y="6263640"/>
+            <a:off x="777240" y="6309360"/>
             <a:ext cx="10607040" cy="365760"/>
           </a:xfrm>
           <a:prstGeom prst="rect">
@@ -9972,7 +10511,7 @@
         <p:spPr>
           <a:xfrm>
             <a:off x="777240" y="1965960"/>
-            <a:ext cx="10607040" cy="4206240"/>
+            <a:ext cx="10607040" cy="1088136"/>
           </a:xfrm>
           <a:prstGeom prst="rect">
             <a:avLst/>
@@ -9991,7 +10530,7 @@
               </a:spcAft>
             </a:pPr>
             <a:r>
-              <a:rPr sz="2100">
+              <a:rPr sz="2100" b="0">
                 <a:solidFill>
                   <a:srgbClr val="1C1C1A"/>
                 </a:solidFill>
@@ -10007,7 +10546,7 @@
               </a:spcAft>
             </a:pPr>
             <a:r>
-              <a:rPr sz="2100">
+              <a:rPr sz="2100" b="0">
                 <a:solidFill>
                   <a:srgbClr val="1C1C1A"/>
                 </a:solidFill>
@@ -10026,7 +10565,7 @@
         </p:nvSpPr>
         <p:spPr>
           <a:xfrm>
-            <a:off x="777240" y="6263640"/>
+            <a:off x="777240" y="6309360"/>
             <a:ext cx="10607040" cy="365760"/>
           </a:xfrm>
           <a:prstGeom prst="rect">
@@ -10157,7 +10696,7 @@
         <p:spPr>
           <a:xfrm>
             <a:off x="777240" y="1965960"/>
-            <a:ext cx="10607040" cy="4206240"/>
+            <a:ext cx="10607040" cy="1088136"/>
           </a:xfrm>
           <a:prstGeom prst="rect">
             <a:avLst/>
@@ -10176,7 +10715,7 @@
               </a:spcAft>
             </a:pPr>
             <a:r>
-              <a:rPr sz="2100">
+              <a:rPr sz="2100" b="0">
                 <a:solidFill>
                   <a:srgbClr val="1C1C1A"/>
                 </a:solidFill>
@@ -10192,7 +10731,7 @@
               </a:spcAft>
             </a:pPr>
             <a:r>
-              <a:rPr sz="2100">
+              <a:rPr sz="2100" b="0">
                 <a:solidFill>
                   <a:srgbClr val="1C1C1A"/>
                 </a:solidFill>
@@ -10211,7 +10750,7 @@
         </p:nvSpPr>
         <p:spPr>
           <a:xfrm>
-            <a:off x="777240" y="6263640"/>
+            <a:off x="777240" y="6309360"/>
             <a:ext cx="10607040" cy="365760"/>
           </a:xfrm>
           <a:prstGeom prst="rect">
@@ -10342,7 +10881,7 @@
         <p:spPr>
           <a:xfrm>
             <a:off x="777240" y="1965960"/>
-            <a:ext cx="10607040" cy="4206240"/>
+            <a:ext cx="10607040" cy="1088136"/>
           </a:xfrm>
           <a:prstGeom prst="rect">
             <a:avLst/>
@@ -10361,13 +10900,22 @@
               </a:spcAft>
             </a:pPr>
             <a:r>
-              <a:rPr sz="2100">
+              <a:rPr sz="2100" b="1">
                 <a:solidFill>
                   <a:srgbClr val="1C1C1A"/>
                 </a:solidFill>
                 <a:latin typeface="Calibri"/>
               </a:rPr>
-              <a:t>**[profile the columns]** &gt; [decide per field] &gt; [find the hidden rows] &gt; [investigate the extremes] &gt; [ship with the log]</a:t>
+              <a:t>[profile the columns]</a:t>
+            </a:r>
+            <a:r>
+              <a:rPr sz="2100" b="0">
+                <a:solidFill>
+                  <a:srgbClr val="1C1C1A"/>
+                </a:solidFill>
+                <a:latin typeface="Calibri"/>
+              </a:rPr>
+              <a:t> &gt; [decide per field] &gt; [find the hidden rows] &gt; [investigate the extremes] &gt; [ship with the log]</a:t>
             </a:r>
           </a:p>
           <a:p>
@@ -10377,7 +10925,7 @@
               </a:spcAft>
             </a:pPr>
             <a:r>
-              <a:rPr sz="2100">
+              <a:rPr sz="2100" b="0">
                 <a:solidFill>
                   <a:srgbClr val="1C1C1A"/>
                 </a:solidFill>
@@ -10396,7 +10944,7 @@
         </p:nvSpPr>
         <p:spPr>
           <a:xfrm>
-            <a:off x="777240" y="6263640"/>
+            <a:off x="777240" y="6309360"/>
             <a:ext cx="10607040" cy="365760"/>
           </a:xfrm>
           <a:prstGeom prst="rect">
@@ -10528,7 +11076,7 @@
         <p:spPr>
           <a:xfrm>
             <a:off x="777240" y="1965960"/>
-            <a:ext cx="10607040" cy="4206240"/>
+            <a:ext cx="10607040" cy="704088"/>
           </a:xfrm>
           <a:prstGeom prst="rect">
             <a:avLst/>
@@ -10547,13 +11095,22 @@
               </a:spcAft>
             </a:pPr>
             <a:r>
-              <a:rPr sz="2100">
+              <a:rPr sz="2100" b="1">
                 <a:solidFill>
                   <a:srgbClr val="FFFFFF"/>
                 </a:solidFill>
                 <a:latin typeface="Calibri"/>
               </a:rPr>
-              <a:t>**[profile the columns]** &gt; [decide per field] &gt; [find the hidden rows] &gt; [investigate the extremes] &gt; [ship with the log]</a:t>
+              <a:t>[profile the columns]</a:t>
+            </a:r>
+            <a:r>
+              <a:rPr sz="2100" b="0">
+                <a:solidFill>
+                  <a:srgbClr val="FFFFFF"/>
+                </a:solidFill>
+                <a:latin typeface="Calibri"/>
+              </a:rPr>
+              <a:t> &gt; [decide per field] &gt; [find the hidden rows] &gt; [investigate the extremes] &gt; [ship with the log]</a:t>
             </a:r>
           </a:p>
         </p:txBody>
@@ -10566,7 +11123,7 @@
         </p:nvSpPr>
         <p:spPr>
           <a:xfrm>
-            <a:off x="777240" y="6263640"/>
+            <a:off x="777240" y="6309360"/>
             <a:ext cx="10607040" cy="365760"/>
           </a:xfrm>
           <a:prstGeom prst="rect">
@@ -10697,7 +11254,7 @@
         <p:spPr>
           <a:xfrm>
             <a:off x="777240" y="1965960"/>
-            <a:ext cx="10607040" cy="4206240"/>
+            <a:ext cx="10607040" cy="704088"/>
           </a:xfrm>
           <a:prstGeom prst="rect">
             <a:avLst/>
@@ -10716,7 +11273,7 @@
               </a:spcAft>
             </a:pPr>
             <a:r>
-              <a:rPr sz="2100">
+              <a:rPr sz="2100" b="0">
                 <a:solidFill>
                   <a:srgbClr val="1C1C1A"/>
                 </a:solidFill>
@@ -10735,7 +11292,7 @@
         </p:nvSpPr>
         <p:spPr>
           <a:xfrm>
-            <a:off x="777240" y="6263640"/>
+            <a:off x="777240" y="6309360"/>
             <a:ext cx="10607040" cy="365760"/>
           </a:xfrm>
           <a:prstGeom prst="rect">
@@ -10866,7 +11423,7 @@
         <p:spPr>
           <a:xfrm>
             <a:off x="777240" y="1965960"/>
-            <a:ext cx="10607040" cy="4206240"/>
+            <a:ext cx="10607040" cy="1472184"/>
           </a:xfrm>
           <a:prstGeom prst="rect">
             <a:avLst/>
@@ -10885,7 +11442,7 @@
               </a:spcAft>
             </a:pPr>
             <a:r>
-              <a:rPr sz="1700">
+              <a:rPr sz="1700" b="0">
                 <a:solidFill>
                   <a:srgbClr val="2B4A7D"/>
                 </a:solidFill>
@@ -10901,7 +11458,7 @@
               </a:spcAft>
             </a:pPr>
             <a:r>
-              <a:rPr sz="1700">
+              <a:rPr sz="1700" b="0">
                 <a:solidFill>
                   <a:srgbClr val="2B4A7D"/>
                 </a:solidFill>
@@ -10917,7 +11474,7 @@
               </a:spcAft>
             </a:pPr>
             <a:r>
-              <a:rPr sz="1700">
+              <a:rPr sz="1700" b="0">
                 <a:solidFill>
                   <a:srgbClr val="2B4A7D"/>
                 </a:solidFill>
@@ -10926,6 +11483,29 @@
               <a:t>distinct    how many different values there are</a:t>
             </a:r>
           </a:p>
+        </p:txBody>
+      </p:sp>
+      <p:sp>
+        <p:nvSpPr>
+          <p:cNvPr id="5" name="TextBox 4"/>
+          <p:cNvSpPr txBox="1"/>
+          <p:nvPr/>
+        </p:nvSpPr>
+        <p:spPr>
+          <a:xfrm>
+            <a:off x="777240" y="3575303"/>
+            <a:ext cx="10607040" cy="704088"/>
+          </a:xfrm>
+          <a:prstGeom prst="rect">
+            <a:avLst/>
+          </a:prstGeom>
+          <a:noFill/>
+        </p:spPr>
+        <p:txBody>
+          <a:bodyPr wrap="square">
+            <a:spAutoFit/>
+          </a:bodyPr>
+          <a:lstStyle/>
           <a:p>
             <a:pPr>
               <a:spcAft>
@@ -10933,7 +11513,7 @@
               </a:spcAft>
             </a:pPr>
             <a:r>
-              <a:rPr sz="2100">
+              <a:rPr sz="2100" b="0">
                 <a:solidFill>
                   <a:srgbClr val="1C1C1A"/>
                 </a:solidFill>
@@ -10946,13 +11526,13 @@
       </p:sp>
       <p:sp>
         <p:nvSpPr>
-          <p:cNvPr id="5" name="TextBox 4"/>
-          <p:cNvSpPr txBox="1"/>
-          <p:nvPr/>
-        </p:nvSpPr>
-        <p:spPr>
-          <a:xfrm>
-            <a:off x="777240" y="6263640"/>
+          <p:cNvPr id="6" name="TextBox 5"/>
+          <p:cNvSpPr txBox="1"/>
+          <p:nvPr/>
+        </p:nvSpPr>
+        <p:spPr>
+          <a:xfrm>
+            <a:off x="777240" y="6309360"/>
             <a:ext cx="10607040" cy="365760"/>
           </a:xfrm>
           <a:prstGeom prst="rect">

--- a/content/W01/D3/C2_W01_D03_deck_STUDENT.pptx
+++ b/content/W01/D3/C2_W01_D03_deck_STUDENT.pptx
@@ -16754,7 +16754,7 @@
                 </a:solidFill>
                 <a:latin typeface="Calibri"/>
               </a:rPr>
-              <a:t>A fence, done properly</a:t>
+              <a:t>A simple fence</a:t>
             </a:r>
           </a:p>
         </p:txBody>
@@ -16768,7 +16768,7 @@
         <p:spPr>
           <a:xfrm>
             <a:off x="777240" y="1965960"/>
-            <a:ext cx="10607040" cy="2028825"/>
+            <a:ext cx="10607040" cy="1905000"/>
           </a:xfrm>
           <a:prstGeom prst="rect">
             <a:avLst/>
@@ -16809,7 +16809,7 @@
                 </a:solidFill>
                 <a:latin typeface="Calibri"/>
               </a:rPr>
-              <a:t>$$\text{IQR} = Q_3 - Q_1 \qquad \text{upper fence} = Q_3 + 1.5 \times \text{IQR}$$</a:t>
+              <a:t>Today's version is deliberately crude. Take the middle order and multiply it by ten.</a:t>
             </a:r>
           </a:p>
           <a:p>
@@ -16825,7 +16825,7 @@
                 </a:solidFill>
                 <a:latin typeface="Calibri"/>
               </a:rPr>
-              <a:t>On today's 44 usable amounts:</a:t>
+              <a:t>$$\text{fence} = 10 \times \text{median} = 10 \times 1910 = 19{,}100$$</a:t>
             </a:r>
           </a:p>
           <a:p>
@@ -16841,23 +16841,7 @@
                 </a:solidFill>
                 <a:latin typeface="Calibri"/>
               </a:rPr>
-              <a:t>$$Q_1 = 1302.5 \qquad Q_3 = 2666.25 \qquad \text{IQR} = 1363.75$$</a:t>
-            </a:r>
-          </a:p>
-          <a:p>
-            <a:pPr>
-              <a:spcAft>
-                <a:spcPts val="1000"/>
-              </a:spcAft>
-            </a:pPr>
-            <a:r>
-              <a:rPr sz="2100" b="0">
-                <a:solidFill>
-                  <a:srgbClr val="1C1C1A"/>
-                </a:solidFill>
-                <a:latin typeface="Calibri"/>
-              </a:rPr>
-              <a:t>$$\text{upper fence} = 2666.25 + 1.5 \times 1363.75 = 4711.875$$</a:t>
+              <a:t>Somebody chose the ten, and that somebody is you. Tomorrow you replace it with a threshold built from the spread of the data itself, so that nobody has to choose a number.</a:t>
             </a:r>
           </a:p>
         </p:txBody>
@@ -17026,7 +17010,7 @@
                 </a:solidFill>
                 <a:latin typeface="Calibri"/>
               </a:rPr>
-              <a:t>Exactly one value sits above Rs 4,711.88, and it is the Rs 480,000 order.</a:t>
+              <a:t>Exactly one value sits above Rs 19,100, and it is the Rs 480,000 order.</a:t>
             </a:r>
           </a:p>
           <a:p>
@@ -17042,7 +17026,7 @@
                 </a:solidFill>
                 <a:latin typeface="Calibri"/>
               </a:rPr>
-              <a:t>Nothing sits below the lower fence, which comes out negative, so it could not flag anything even if a negative amount existed.</a:t>
+              <a:t>The largest ordinary order is Rs 2,995, which is not close to the fence, so nothing borderline is being swept up with it.</a:t>
             </a:r>
           </a:p>
           <a:p>
@@ -17058,7 +17042,7 @@
                 </a:solidFill>
                 <a:latin typeface="Calibri"/>
               </a:rPr>
-              <a:t>The fence found the row you had already spotted by sorting. That agreement is what tells you the fence is calibrated for this column rather than borrowed from somewhere else.</a:t>
+              <a:t>The fence found the row you had already spotted by sorting. That agreement is what tells you the number you picked is doing its job on this column.</a:t>
             </a:r>
           </a:p>
         </p:txBody>
@@ -17241,7 +17225,7 @@
                 </a:solidFill>
                 <a:latin typeface="Calibri"/>
               </a:rPr>
-              <a:t>Where the 1.5 comes from, and why you should say so out loud</a:t>
+              <a:t>What is wrong with choosing the ten, and what replaces it</a:t>
             </a:r>
           </a:p>
         </p:txBody>
@@ -17255,7 +17239,7 @@
         <p:spPr>
           <a:xfrm>
             <a:off x="777240" y="1965960"/>
-            <a:ext cx="10607040" cy="3638550"/>
+            <a:ext cx="10607040" cy="4206240"/>
           </a:xfrm>
           <a:prstGeom prst="rect">
             <a:avLst/>
@@ -17280,7 +17264,7 @@
                 </a:solidFill>
                 <a:latin typeface="Calibri"/>
               </a:rPr>
-              <a:t>The 1.5 is a convention, not a law. It comes from the box plot as it was popularised in exploratory data analysis, chosen so that on a normal distribution roughly 0.7 percent of values fall outside the fence.</a:t>
+              <a:t>The fence works and it is still crude, because the ten came from your judgement rather than from the data.</a:t>
             </a:r>
           </a:p>
           <a:p>
@@ -17296,7 +17280,7 @@
                 </a:solidFill>
                 <a:latin typeface="Calibri"/>
               </a:rPr>
-              <a:t>Two consequences you should be able to state:</a:t>
+              <a:t>Two consequences you should be able to state.</a:t>
             </a:r>
           </a:p>
           <a:p>
@@ -17312,7 +17296,7 @@
                 </a:solidFill>
                 <a:latin typeface="Calibri"/>
               </a:rPr>
-              <a:t>The first is that order amounts are not normally distributed. Money is skewed to the right in almost every business, because there is a floor at zero and no ceiling. So a fence tuned for a normal distribution will flag ordinary large orders in a healthy business, and you should expect to look at the flags rather than trust them.</a:t>
+              <a:t>The first is that the number does not travel. Ten times the median is a sensible fence on order amounts in this business and a useless one on delivery times, on ages, or on a column where the median is near zero. Every new column needs you to choose again, and there is nothing to argue with when somebody disagrees with your choice.</a:t>
             </a:r>
           </a:p>
           <a:p>
@@ -17328,7 +17312,23 @@
                 </a:solidFill>
                 <a:latin typeface="Calibri"/>
               </a:rPr>
-              <a:t>The second is that changing 1.5 changes what you find, so the multiplier is part of your written decision. A fence at 3.0 instead of 1.5 gives an upper bound of Rs 6,757.50 here and still catches only the same one order, which is worth knowing before somebody accuses the number of being arbitrary.</a:t>
+              <a:t>The second is that it moves when the data moves. The median here is Rs 1,910 and the whale is inside the same file, so a fence built from the median is already being pulled by the record it is meant to catch.</a:t>
+            </a:r>
+          </a:p>
+          <a:p>
+            <a:pPr>
+              <a:spcAft>
+                <a:spcPts val="1000"/>
+              </a:spcAft>
+            </a:pPr>
+            <a:r>
+              <a:rPr sz="2100" b="0">
+                <a:solidFill>
+                  <a:srgbClr val="1C1C1A"/>
+                </a:solidFill>
+                <a:latin typeface="Calibri"/>
+              </a:rPr>
+              <a:t>Tomorrow's version fixes both. It builds the threshold out of the spread of the middle half of the data, which ignores the tail by construction, and it is the same arithmetic on every column so nobody has to pick a number. Today's fence is the version you can compute in your head, and the point of computing it today is that tomorrow you will know what the better one is better than.</a:t>
             </a:r>
           </a:p>
         </p:txBody>
